--- a/docs/ppt/Week3_公务员考试学习跟踪系统_答辩.pptx
+++ b/docs/ppt/Week3_公务员考试学习跟踪系统_答辩.pptx
@@ -3195,7 +3195,7 @@
         </p:nvSpPr>
         <p:spPr>
           <a:xfrm>
-            <a:off x="512064" y="1097280"/>
+            <a:off x="512064" y="1005840"/>
             <a:ext cx="11167567" cy="914400"/>
           </a:xfrm>
           <a:prstGeom prst="rect">
@@ -3213,7 +3213,7 @@
               <a:lnSpc>
                 <a:spcPct val="130000"/>
               </a:lnSpc>
-              <a:defRPr sz="4800" b="1">
+              <a:defRPr sz="4400" b="1">
                 <a:solidFill>
                   <a:srgbClr val="FFFFFF"/>
                 </a:solidFill>
@@ -3234,7 +3234,7 @@
         </p:nvSpPr>
         <p:spPr>
           <a:xfrm>
-            <a:off x="512064" y="2194560"/>
+            <a:off x="512064" y="2011680"/>
             <a:ext cx="11167567" cy="548640"/>
           </a:xfrm>
           <a:prstGeom prst="rect">
@@ -3252,7 +3252,7 @@
               <a:lnSpc>
                 <a:spcPct val="130000"/>
               </a:lnSpc>
-              <a:defRPr sz="2400" b="0">
+              <a:defRPr sz="2100" b="0">
                 <a:solidFill>
                   <a:srgbClr val="E8F4FC"/>
                 </a:solidFill>
@@ -3273,7 +3273,7 @@
         </p:nvSpPr>
         <p:spPr>
           <a:xfrm>
-            <a:off x="4267047" y="3200400"/>
+            <a:off x="4267047" y="2926080"/>
             <a:ext cx="3657600" cy="25400"/>
           </a:xfrm>
           <a:prstGeom prst="rect">
@@ -3316,7 +3316,7 @@
         </p:nvSpPr>
         <p:spPr>
           <a:xfrm>
-            <a:off x="6040983" y="3154680"/>
+            <a:off x="6040983" y="2880360"/>
             <a:ext cx="109728" cy="109728"/>
           </a:xfrm>
           <a:prstGeom prst="ellipse">
@@ -3359,7 +3359,7 @@
         </p:nvSpPr>
         <p:spPr>
           <a:xfrm>
-            <a:off x="512064" y="3840480"/>
+            <a:off x="512064" y="3474720"/>
             <a:ext cx="11167567" cy="1828800"/>
           </a:xfrm>
           <a:prstGeom prst="rect">
@@ -3375,9 +3375,9 @@
           <a:p>
             <a:pPr algn="ctr">
               <a:lnSpc>
-                <a:spcPct val="150000"/>
+                <a:spcPct val="125000"/>
               </a:lnSpc>
-              <a:defRPr sz="2000" b="0">
+              <a:defRPr sz="1700" b="0">
                 <a:solidFill>
                   <a:srgbClr val="666666"/>
                 </a:solidFill>
@@ -3410,7 +3410,7 @@
         </p:nvSpPr>
         <p:spPr>
           <a:xfrm>
-            <a:off x="512064" y="6400800"/>
+            <a:off x="512064" y="6528816"/>
             <a:ext cx="11167567" cy="12700"/>
           </a:xfrm>
           <a:prstGeom prst="rect">
@@ -3453,7 +3453,7 @@
         </p:nvSpPr>
         <p:spPr>
           <a:xfrm>
-            <a:off x="10948111" y="6492240"/>
+            <a:off x="10948111" y="6620256"/>
             <a:ext cx="731520" cy="274320"/>
           </a:xfrm>
           <a:prstGeom prst="rect">
@@ -3508,7 +3508,7 @@
         <p:spPr>
           <a:xfrm>
             <a:off x="0" y="0"/>
-            <a:ext cx="12191695" cy="886968"/>
+            <a:ext cx="12191695" cy="658368"/>
           </a:xfrm>
           <a:prstGeom prst="rect">
             <a:avLst/>
@@ -3551,7 +3551,7 @@
         <p:spPr>
           <a:xfrm>
             <a:off x="0" y="0"/>
-            <a:ext cx="54864" cy="886968"/>
+            <a:ext cx="54864" cy="658368"/>
           </a:xfrm>
           <a:prstGeom prst="rect">
             <a:avLst/>
@@ -3593,7 +3593,7 @@
         </p:nvSpPr>
         <p:spPr>
           <a:xfrm>
-            <a:off x="10308031" y="283464"/>
+            <a:off x="10308031" y="169164"/>
             <a:ext cx="1371600" cy="320040"/>
           </a:xfrm>
           <a:prstGeom prst="roundRect">
@@ -3652,7 +3652,7 @@
         </p:nvSpPr>
         <p:spPr>
           <a:xfrm>
-            <a:off x="603504" y="260604"/>
+            <a:off x="603504" y="146304"/>
             <a:ext cx="9613087" cy="457200"/>
           </a:xfrm>
           <a:prstGeom prst="rect">
@@ -3667,7 +3667,7 @@
           <a:lstStyle/>
           <a:p>
             <a:pPr>
-              <a:defRPr sz="2400" b="1">
+              <a:defRPr sz="2000" b="1">
                 <a:solidFill>
                   <a:srgbClr val="FFFFFF"/>
                 </a:solidFill>
@@ -3688,8 +3688,8 @@
         </p:nvSpPr>
         <p:spPr>
           <a:xfrm>
-            <a:off x="512064" y="1508760"/>
-            <a:ext cx="2620441" cy="1463040"/>
+            <a:off x="512064" y="1033272"/>
+            <a:ext cx="2654731" cy="1143000"/>
           </a:xfrm>
           <a:prstGeom prst="roundRect">
             <a:avLst/>
@@ -3721,38 +3721,38 @@
           <a:p>
             <a:pPr algn="ctr">
               <a:spcAft>
+                <a:spcPts val="200"/>
+              </a:spcAft>
+              <a:defRPr sz="3000" b="1">
+                <a:solidFill>
+                  <a:srgbClr val="0066CC"/>
+                </a:solidFill>
+                <a:latin typeface="Microsoft YaHei"/>
+              </a:defRPr>
+            </a:pPr>
+            <a:r>
+              <a:t>7</a:t>
+            </a:r>
+          </a:p>
+          <a:p>
+            <a:pPr algn="ctr">
+              <a:spcAft>
                 <a:spcPts val="400"/>
               </a:spcAft>
-              <a:defRPr sz="3600" b="1">
-                <a:solidFill>
-                  <a:srgbClr val="0066CC"/>
-                </a:solidFill>
-                <a:latin typeface="Microsoft YaHei"/>
-              </a:defRPr>
-            </a:pPr>
-            <a:r>
-              <a:t>7</a:t>
+              <a:defRPr sz="1100">
+                <a:solidFill>
+                  <a:srgbClr val="666666"/>
+                </a:solidFill>
+                <a:latin typeface="Microsoft YaHei"/>
+              </a:defRPr>
+            </a:pPr>
+            <a:r>
+              <a:t>个</a:t>
             </a:r>
           </a:p>
           <a:p>
             <a:pPr algn="ctr">
-              <a:spcAft>
-                <a:spcPts val="800"/>
-              </a:spcAft>
-              <a:defRPr sz="1400">
-                <a:solidFill>
-                  <a:srgbClr val="666666"/>
-                </a:solidFill>
-                <a:latin typeface="Microsoft YaHei"/>
-              </a:defRPr>
-            </a:pPr>
-            <a:r>
-              <a:t>个</a:t>
-            </a:r>
-          </a:p>
-          <a:p>
-            <a:pPr algn="ctr">
-              <a:defRPr sz="1400">
+              <a:defRPr sz="1100">
                 <a:solidFill>
                   <a:srgbClr val="333333"/>
                 </a:solidFill>
@@ -3773,8 +3773,8 @@
         </p:nvSpPr>
         <p:spPr>
           <a:xfrm>
-            <a:off x="3361105" y="1508760"/>
-            <a:ext cx="2620441" cy="1463040"/>
+            <a:off x="3349675" y="1033272"/>
+            <a:ext cx="2654731" cy="1143000"/>
           </a:xfrm>
           <a:prstGeom prst="roundRect">
             <a:avLst/>
@@ -3806,38 +3806,38 @@
           <a:p>
             <a:pPr algn="ctr">
               <a:spcAft>
+                <a:spcPts val="200"/>
+              </a:spcAft>
+              <a:defRPr sz="3000" b="1">
+                <a:solidFill>
+                  <a:srgbClr val="0066CC"/>
+                </a:solidFill>
+                <a:latin typeface="Microsoft YaHei"/>
+              </a:defRPr>
+            </a:pPr>
+            <a:r>
+              <a:t>12</a:t>
+            </a:r>
+          </a:p>
+          <a:p>
+            <a:pPr algn="ctr">
+              <a:spcAft>
                 <a:spcPts val="400"/>
               </a:spcAft>
-              <a:defRPr sz="3600" b="1">
-                <a:solidFill>
-                  <a:srgbClr val="0066CC"/>
-                </a:solidFill>
-                <a:latin typeface="Microsoft YaHei"/>
-              </a:defRPr>
-            </a:pPr>
-            <a:r>
-              <a:t>12</a:t>
+              <a:defRPr sz="1100">
+                <a:solidFill>
+                  <a:srgbClr val="666666"/>
+                </a:solidFill>
+                <a:latin typeface="Microsoft YaHei"/>
+              </a:defRPr>
+            </a:pPr>
+            <a:r>
+              <a:t>张</a:t>
             </a:r>
           </a:p>
           <a:p>
             <a:pPr algn="ctr">
-              <a:spcAft>
-                <a:spcPts val="800"/>
-              </a:spcAft>
-              <a:defRPr sz="1400">
-                <a:solidFill>
-                  <a:srgbClr val="666666"/>
-                </a:solidFill>
-                <a:latin typeface="Microsoft YaHei"/>
-              </a:defRPr>
-            </a:pPr>
-            <a:r>
-              <a:t>张</a:t>
-            </a:r>
-          </a:p>
-          <a:p>
-            <a:pPr algn="ctr">
-              <a:defRPr sz="1400">
+              <a:defRPr sz="1100">
                 <a:solidFill>
                   <a:srgbClr val="333333"/>
                 </a:solidFill>
@@ -3858,8 +3858,8 @@
         </p:nvSpPr>
         <p:spPr>
           <a:xfrm>
-            <a:off x="6210147" y="1508760"/>
-            <a:ext cx="2620441" cy="1463040"/>
+            <a:off x="6187287" y="1033272"/>
+            <a:ext cx="2654731" cy="1143000"/>
           </a:xfrm>
           <a:prstGeom prst="roundRect">
             <a:avLst/>
@@ -3891,38 +3891,38 @@
           <a:p>
             <a:pPr algn="ctr">
               <a:spcAft>
+                <a:spcPts val="200"/>
+              </a:spcAft>
+              <a:defRPr sz="3000" b="1">
+                <a:solidFill>
+                  <a:srgbClr val="0066CC"/>
+                </a:solidFill>
+                <a:latin typeface="Microsoft YaHei"/>
+              </a:defRPr>
+            </a:pPr>
+            <a:r>
+              <a:t>200</a:t>
+            </a:r>
+          </a:p>
+          <a:p>
+            <a:pPr algn="ctr">
+              <a:spcAft>
                 <a:spcPts val="400"/>
               </a:spcAft>
-              <a:defRPr sz="3600" b="1">
-                <a:solidFill>
-                  <a:srgbClr val="0066CC"/>
-                </a:solidFill>
-                <a:latin typeface="Microsoft YaHei"/>
-              </a:defRPr>
-            </a:pPr>
-            <a:r>
-              <a:t>200</a:t>
+              <a:defRPr sz="1100">
+                <a:solidFill>
+                  <a:srgbClr val="666666"/>
+                </a:solidFill>
+                <a:latin typeface="Microsoft YaHei"/>
+              </a:defRPr>
+            </a:pPr>
+            <a:r>
+              <a:t>题</a:t>
             </a:r>
           </a:p>
           <a:p>
             <a:pPr algn="ctr">
-              <a:spcAft>
-                <a:spcPts val="800"/>
-              </a:spcAft>
-              <a:defRPr sz="1400">
-                <a:solidFill>
-                  <a:srgbClr val="666666"/>
-                </a:solidFill>
-                <a:latin typeface="Microsoft YaHei"/>
-              </a:defRPr>
-            </a:pPr>
-            <a:r>
-              <a:t>题</a:t>
-            </a:r>
-          </a:p>
-          <a:p>
-            <a:pPr algn="ctr">
-              <a:defRPr sz="1400">
+              <a:defRPr sz="1100">
                 <a:solidFill>
                   <a:srgbClr val="333333"/>
                 </a:solidFill>
@@ -3943,8 +3943,8 @@
         </p:nvSpPr>
         <p:spPr>
           <a:xfrm>
-            <a:off x="9059189" y="1508760"/>
-            <a:ext cx="2620441" cy="1463040"/>
+            <a:off x="9024899" y="1033272"/>
+            <a:ext cx="2654731" cy="1143000"/>
           </a:xfrm>
           <a:prstGeom prst="roundRect">
             <a:avLst/>
@@ -3976,38 +3976,38 @@
           <a:p>
             <a:pPr algn="ctr">
               <a:spcAft>
+                <a:spcPts val="200"/>
+              </a:spcAft>
+              <a:defRPr sz="3000" b="1">
+                <a:solidFill>
+                  <a:srgbClr val="0066CC"/>
+                </a:solidFill>
+                <a:latin typeface="Microsoft YaHei"/>
+              </a:defRPr>
+            </a:pPr>
+            <a:r>
+              <a:t>23</a:t>
+            </a:r>
+          </a:p>
+          <a:p>
+            <a:pPr algn="ctr">
+              <a:spcAft>
                 <a:spcPts val="400"/>
               </a:spcAft>
-              <a:defRPr sz="3600" b="1">
-                <a:solidFill>
-                  <a:srgbClr val="0066CC"/>
-                </a:solidFill>
-                <a:latin typeface="Microsoft YaHei"/>
-              </a:defRPr>
-            </a:pPr>
-            <a:r>
-              <a:t>23</a:t>
+              <a:defRPr sz="1100">
+                <a:solidFill>
+                  <a:srgbClr val="666666"/>
+                </a:solidFill>
+                <a:latin typeface="Microsoft YaHei"/>
+              </a:defRPr>
+            </a:pPr>
+            <a:r>
+              <a:t>条</a:t>
             </a:r>
           </a:p>
           <a:p>
             <a:pPr algn="ctr">
-              <a:spcAft>
-                <a:spcPts val="800"/>
-              </a:spcAft>
-              <a:defRPr sz="1400">
-                <a:solidFill>
-                  <a:srgbClr val="666666"/>
-                </a:solidFill>
-                <a:latin typeface="Microsoft YaHei"/>
-              </a:defRPr>
-            </a:pPr>
-            <a:r>
-              <a:t>条</a:t>
-            </a:r>
-          </a:p>
-          <a:p>
-            <a:pPr algn="ctr">
-              <a:defRPr sz="1400">
+              <a:defRPr sz="1100">
                 <a:solidFill>
                   <a:srgbClr val="333333"/>
                 </a:solidFill>
@@ -4028,8 +4028,8 @@
         </p:nvSpPr>
         <p:spPr>
           <a:xfrm>
-            <a:off x="512064" y="3154680"/>
-            <a:ext cx="11167567" cy="3008376"/>
+            <a:off x="512064" y="2496312"/>
+            <a:ext cx="11167567" cy="3877056"/>
           </a:xfrm>
           <a:prstGeom prst="rect">
             <a:avLst/>
@@ -4044,12 +4044,12 @@
           <a:p>
             <a:pPr>
               <a:lnSpc>
-                <a:spcPct val="130000"/>
+                <a:spcPct val="110000"/>
               </a:lnSpc>
               <a:spcAft>
-                <a:spcPts val="1000"/>
-              </a:spcAft>
-              <a:defRPr sz="1800">
+                <a:spcPts val="400"/>
+              </a:spcAft>
+              <a:defRPr sz="1700">
                 <a:solidFill>
                   <a:srgbClr val="333333"/>
                 </a:solidFill>
@@ -4063,12 +4063,12 @@
           <a:p>
             <a:pPr>
               <a:lnSpc>
-                <a:spcPct val="130000"/>
+                <a:spcPct val="110000"/>
               </a:lnSpc>
               <a:spcAft>
-                <a:spcPts val="1000"/>
-              </a:spcAft>
-              <a:defRPr sz="1800">
+                <a:spcPts val="400"/>
+              </a:spcAft>
+              <a:defRPr sz="1700">
                 <a:solidFill>
                   <a:srgbClr val="333333"/>
                 </a:solidFill>
@@ -4082,12 +4082,12 @@
           <a:p>
             <a:pPr>
               <a:lnSpc>
-                <a:spcPct val="130000"/>
+                <a:spcPct val="110000"/>
               </a:lnSpc>
               <a:spcAft>
-                <a:spcPts val="1000"/>
-              </a:spcAft>
-              <a:defRPr sz="1800">
+                <a:spcPts val="400"/>
+              </a:spcAft>
+              <a:defRPr sz="1700">
                 <a:solidFill>
                   <a:srgbClr val="333333"/>
                 </a:solidFill>
@@ -4101,12 +4101,12 @@
           <a:p>
             <a:pPr>
               <a:lnSpc>
-                <a:spcPct val="130000"/>
+                <a:spcPct val="110000"/>
               </a:lnSpc>
               <a:spcAft>
-                <a:spcPts val="1000"/>
-              </a:spcAft>
-              <a:defRPr sz="1800">
+                <a:spcPts val="400"/>
+              </a:spcAft>
+              <a:defRPr sz="1700">
                 <a:solidFill>
                   <a:srgbClr val="333333"/>
                 </a:solidFill>
@@ -4127,7 +4127,7 @@
         </p:nvSpPr>
         <p:spPr>
           <a:xfrm>
-            <a:off x="512064" y="6400800"/>
+            <a:off x="512064" y="6528816"/>
             <a:ext cx="11167567" cy="12700"/>
           </a:xfrm>
           <a:prstGeom prst="rect">
@@ -4170,7 +4170,7 @@
         </p:nvSpPr>
         <p:spPr>
           <a:xfrm>
-            <a:off x="10948111" y="6492240"/>
+            <a:off x="10948111" y="6620256"/>
             <a:ext cx="731520" cy="274320"/>
           </a:xfrm>
           <a:prstGeom prst="rect">
@@ -4225,7 +4225,7 @@
         <p:spPr>
           <a:xfrm>
             <a:off x="0" y="0"/>
-            <a:ext cx="12191695" cy="886968"/>
+            <a:ext cx="12191695" cy="658368"/>
           </a:xfrm>
           <a:prstGeom prst="rect">
             <a:avLst/>
@@ -4268,7 +4268,7 @@
         <p:spPr>
           <a:xfrm>
             <a:off x="0" y="0"/>
-            <a:ext cx="54864" cy="886968"/>
+            <a:ext cx="54864" cy="658368"/>
           </a:xfrm>
           <a:prstGeom prst="rect">
             <a:avLst/>
@@ -4310,7 +4310,7 @@
         </p:nvSpPr>
         <p:spPr>
           <a:xfrm>
-            <a:off x="10308031" y="283464"/>
+            <a:off x="10308031" y="169164"/>
             <a:ext cx="1371600" cy="320040"/>
           </a:xfrm>
           <a:prstGeom prst="roundRect">
@@ -4369,7 +4369,7 @@
         </p:nvSpPr>
         <p:spPr>
           <a:xfrm>
-            <a:off x="603504" y="260604"/>
+            <a:off x="603504" y="146304"/>
             <a:ext cx="9613087" cy="457200"/>
           </a:xfrm>
           <a:prstGeom prst="rect">
@@ -4384,7 +4384,7 @@
           <a:lstStyle/>
           <a:p>
             <a:pPr>
-              <a:defRPr sz="2400" b="1">
+              <a:defRPr sz="2000" b="1">
                 <a:solidFill>
                   <a:srgbClr val="FFFFFF"/>
                 </a:solidFill>
@@ -4405,8 +4405,8 @@
         </p:nvSpPr>
         <p:spPr>
           <a:xfrm>
-            <a:off x="512064" y="1325880"/>
-            <a:ext cx="5400903" cy="411480"/>
+            <a:off x="512064" y="941832"/>
+            <a:ext cx="5400903" cy="347472"/>
           </a:xfrm>
           <a:prstGeom prst="roundRect">
             <a:avLst/>
@@ -4440,9 +4440,9 @@
           <a:p>
             <a:pPr algn="ctr">
               <a:spcAft>
-                <a:spcPts val="800"/>
-              </a:spcAft>
-              <a:defRPr sz="2000" b="1">
+                <a:spcPts val="400"/>
+              </a:spcAft>
+              <a:defRPr sz="1600" b="1">
                 <a:solidFill>
                   <a:srgbClr val="003366"/>
                 </a:solidFill>
@@ -4463,8 +4463,8 @@
         </p:nvSpPr>
         <p:spPr>
           <a:xfrm>
-            <a:off x="512064" y="1874520"/>
-            <a:ext cx="5400903" cy="4471416"/>
+            <a:off x="512064" y="1371600"/>
+            <a:ext cx="5400903" cy="5065776"/>
           </a:xfrm>
           <a:prstGeom prst="rect">
             <a:avLst/>
@@ -4479,12 +4479,12 @@
           <a:p>
             <a:pPr>
               <a:lnSpc>
-                <a:spcPct val="130000"/>
+                <a:spcPct val="110000"/>
               </a:lnSpc>
               <a:spcAft>
-                <a:spcPts val="1000"/>
-              </a:spcAft>
-              <a:defRPr sz="1600">
+                <a:spcPts val="400"/>
+              </a:spcAft>
+              <a:defRPr sz="1400">
                 <a:solidFill>
                   <a:srgbClr val="333333"/>
                 </a:solidFill>
@@ -4498,12 +4498,12 @@
           <a:p>
             <a:pPr>
               <a:lnSpc>
-                <a:spcPct val="130000"/>
+                <a:spcPct val="110000"/>
               </a:lnSpc>
               <a:spcAft>
-                <a:spcPts val="1000"/>
-              </a:spcAft>
-              <a:defRPr sz="1600">
+                <a:spcPts val="400"/>
+              </a:spcAft>
+              <a:defRPr sz="1400">
                 <a:solidFill>
                   <a:srgbClr val="333333"/>
                 </a:solidFill>
@@ -4517,12 +4517,12 @@
           <a:p>
             <a:pPr>
               <a:lnSpc>
-                <a:spcPct val="130000"/>
+                <a:spcPct val="110000"/>
               </a:lnSpc>
               <a:spcAft>
-                <a:spcPts val="1000"/>
-              </a:spcAft>
-              <a:defRPr sz="1600">
+                <a:spcPts val="400"/>
+              </a:spcAft>
+              <a:defRPr sz="1400">
                 <a:solidFill>
                   <a:srgbClr val="333333"/>
                 </a:solidFill>
@@ -4536,12 +4536,12 @@
           <a:p>
             <a:pPr>
               <a:lnSpc>
-                <a:spcPct val="130000"/>
+                <a:spcPct val="110000"/>
               </a:lnSpc>
               <a:spcAft>
-                <a:spcPts val="1000"/>
-              </a:spcAft>
-              <a:defRPr sz="1600">
+                <a:spcPts val="400"/>
+              </a:spcAft>
+              <a:defRPr sz="1400">
                 <a:solidFill>
                   <a:srgbClr val="333333"/>
                 </a:solidFill>
@@ -4562,8 +4562,8 @@
         </p:nvSpPr>
         <p:spPr>
           <a:xfrm>
-            <a:off x="6278727" y="1325880"/>
-            <a:ext cx="5400903" cy="411480"/>
+            <a:off x="6278727" y="941832"/>
+            <a:ext cx="5400903" cy="347472"/>
           </a:xfrm>
           <a:prstGeom prst="roundRect">
             <a:avLst/>
@@ -4597,9 +4597,9 @@
           <a:p>
             <a:pPr algn="ctr">
               <a:spcAft>
-                <a:spcPts val="800"/>
-              </a:spcAft>
-              <a:defRPr sz="2000" b="1">
+                <a:spcPts val="400"/>
+              </a:spcAft>
+              <a:defRPr sz="1600" b="1">
                 <a:solidFill>
                   <a:srgbClr val="003366"/>
                 </a:solidFill>
@@ -4620,8 +4620,8 @@
         </p:nvSpPr>
         <p:spPr>
           <a:xfrm>
-            <a:off x="6278727" y="1874520"/>
-            <a:ext cx="5400903" cy="4471416"/>
+            <a:off x="6278727" y="1371600"/>
+            <a:ext cx="5400903" cy="5065776"/>
           </a:xfrm>
           <a:prstGeom prst="rect">
             <a:avLst/>
@@ -4636,12 +4636,12 @@
           <a:p>
             <a:pPr>
               <a:lnSpc>
-                <a:spcPct val="130000"/>
+                <a:spcPct val="110000"/>
               </a:lnSpc>
               <a:spcAft>
-                <a:spcPts val="1000"/>
-              </a:spcAft>
-              <a:defRPr sz="1600">
+                <a:spcPts val="400"/>
+              </a:spcAft>
+              <a:defRPr sz="1400">
                 <a:solidFill>
                   <a:srgbClr val="333333"/>
                 </a:solidFill>
@@ -4655,12 +4655,12 @@
           <a:p>
             <a:pPr>
               <a:lnSpc>
-                <a:spcPct val="130000"/>
+                <a:spcPct val="110000"/>
               </a:lnSpc>
               <a:spcAft>
-                <a:spcPts val="1000"/>
-              </a:spcAft>
-              <a:defRPr sz="1600">
+                <a:spcPts val="400"/>
+              </a:spcAft>
+              <a:defRPr sz="1400">
                 <a:solidFill>
                   <a:srgbClr val="333333"/>
                 </a:solidFill>
@@ -4674,12 +4674,12 @@
           <a:p>
             <a:pPr>
               <a:lnSpc>
-                <a:spcPct val="130000"/>
+                <a:spcPct val="110000"/>
               </a:lnSpc>
               <a:spcAft>
-                <a:spcPts val="1000"/>
-              </a:spcAft>
-              <a:defRPr sz="1600">
+                <a:spcPts val="400"/>
+              </a:spcAft>
+              <a:defRPr sz="1400">
                 <a:solidFill>
                   <a:srgbClr val="333333"/>
                 </a:solidFill>
@@ -4693,12 +4693,12 @@
           <a:p>
             <a:pPr>
               <a:lnSpc>
-                <a:spcPct val="130000"/>
+                <a:spcPct val="110000"/>
               </a:lnSpc>
               <a:spcAft>
-                <a:spcPts val="1000"/>
-              </a:spcAft>
-              <a:defRPr sz="1600">
+                <a:spcPts val="400"/>
+              </a:spcAft>
+              <a:defRPr sz="1400">
                 <a:solidFill>
                   <a:srgbClr val="333333"/>
                 </a:solidFill>
@@ -4719,7 +4719,7 @@
         </p:nvSpPr>
         <p:spPr>
           <a:xfrm>
-            <a:off x="512064" y="6400800"/>
+            <a:off x="512064" y="6528816"/>
             <a:ext cx="11167567" cy="12700"/>
           </a:xfrm>
           <a:prstGeom prst="rect">
@@ -4762,7 +4762,7 @@
         </p:nvSpPr>
         <p:spPr>
           <a:xfrm>
-            <a:off x="10948111" y="6492240"/>
+            <a:off x="10948111" y="6620256"/>
             <a:ext cx="731520" cy="274320"/>
           </a:xfrm>
           <a:prstGeom prst="rect">
@@ -4817,7 +4817,7 @@
         <p:spPr>
           <a:xfrm>
             <a:off x="0" y="0"/>
-            <a:ext cx="12191695" cy="886968"/>
+            <a:ext cx="12191695" cy="658368"/>
           </a:xfrm>
           <a:prstGeom prst="rect">
             <a:avLst/>
@@ -4860,7 +4860,7 @@
         <p:spPr>
           <a:xfrm>
             <a:off x="0" y="0"/>
-            <a:ext cx="54864" cy="886968"/>
+            <a:ext cx="54864" cy="658368"/>
           </a:xfrm>
           <a:prstGeom prst="rect">
             <a:avLst/>
@@ -4902,7 +4902,7 @@
         </p:nvSpPr>
         <p:spPr>
           <a:xfrm>
-            <a:off x="10308031" y="283464"/>
+            <a:off x="10308031" y="169164"/>
             <a:ext cx="1371600" cy="320040"/>
           </a:xfrm>
           <a:prstGeom prst="roundRect">
@@ -4961,7 +4961,7 @@
         </p:nvSpPr>
         <p:spPr>
           <a:xfrm>
-            <a:off x="603504" y="260604"/>
+            <a:off x="603504" y="146304"/>
             <a:ext cx="9613087" cy="457200"/>
           </a:xfrm>
           <a:prstGeom prst="rect">
@@ -4976,7 +4976,7 @@
           <a:lstStyle/>
           <a:p>
             <a:pPr>
-              <a:defRPr sz="2400" b="1">
+              <a:defRPr sz="2000" b="1">
                 <a:solidFill>
                   <a:srgbClr val="FFFFFF"/>
                 </a:solidFill>
@@ -4997,8 +4997,8 @@
         </p:nvSpPr>
         <p:spPr>
           <a:xfrm>
-            <a:off x="512064" y="1325880"/>
-            <a:ext cx="11167567" cy="4837176"/>
+            <a:off x="512064" y="941832"/>
+            <a:ext cx="11167567" cy="5431536"/>
           </a:xfrm>
           <a:prstGeom prst="rect">
             <a:avLst/>
@@ -5013,12 +5013,12 @@
           <a:p>
             <a:pPr>
               <a:lnSpc>
-                <a:spcPct val="130000"/>
+                <a:spcPct val="110000"/>
               </a:lnSpc>
               <a:spcAft>
-                <a:spcPts val="1000"/>
-              </a:spcAft>
-              <a:defRPr sz="2000">
+                <a:spcPts val="400"/>
+              </a:spcAft>
+              <a:defRPr sz="1700">
                 <a:solidFill>
                   <a:srgbClr val="333333"/>
                 </a:solidFill>
@@ -5032,12 +5032,12 @@
           <a:p>
             <a:pPr>
               <a:lnSpc>
-                <a:spcPct val="130000"/>
+                <a:spcPct val="110000"/>
               </a:lnSpc>
               <a:spcAft>
-                <a:spcPts val="1000"/>
-              </a:spcAft>
-              <a:defRPr sz="2000">
+                <a:spcPts val="400"/>
+              </a:spcAft>
+              <a:defRPr sz="1700">
                 <a:solidFill>
                   <a:srgbClr val="333333"/>
                 </a:solidFill>
@@ -5051,12 +5051,12 @@
           <a:p>
             <a:pPr>
               <a:lnSpc>
-                <a:spcPct val="130000"/>
+                <a:spcPct val="110000"/>
               </a:lnSpc>
               <a:spcAft>
-                <a:spcPts val="1000"/>
-              </a:spcAft>
-              <a:defRPr sz="2000">
+                <a:spcPts val="400"/>
+              </a:spcAft>
+              <a:defRPr sz="1700">
                 <a:solidFill>
                   <a:srgbClr val="333333"/>
                 </a:solidFill>
@@ -5070,12 +5070,12 @@
           <a:p>
             <a:pPr>
               <a:lnSpc>
-                <a:spcPct val="130000"/>
+                <a:spcPct val="110000"/>
               </a:lnSpc>
               <a:spcAft>
-                <a:spcPts val="1000"/>
-              </a:spcAft>
-              <a:defRPr sz="2000">
+                <a:spcPts val="400"/>
+              </a:spcAft>
+              <a:defRPr sz="1700">
                 <a:solidFill>
                   <a:srgbClr val="333333"/>
                 </a:solidFill>
@@ -5089,12 +5089,12 @@
           <a:p>
             <a:pPr>
               <a:lnSpc>
-                <a:spcPct val="130000"/>
+                <a:spcPct val="110000"/>
               </a:lnSpc>
               <a:spcAft>
-                <a:spcPts val="1000"/>
-              </a:spcAft>
-              <a:defRPr sz="2000">
+                <a:spcPts val="400"/>
+              </a:spcAft>
+              <a:defRPr sz="1700">
                 <a:solidFill>
                   <a:srgbClr val="333333"/>
                 </a:solidFill>
@@ -5115,7 +5115,7 @@
         </p:nvSpPr>
         <p:spPr>
           <a:xfrm>
-            <a:off x="512064" y="6400800"/>
+            <a:off x="512064" y="6528816"/>
             <a:ext cx="11167567" cy="12700"/>
           </a:xfrm>
           <a:prstGeom prst="rect">
@@ -5158,7 +5158,7 @@
         </p:nvSpPr>
         <p:spPr>
           <a:xfrm>
-            <a:off x="10948111" y="6492240"/>
+            <a:off x="10948111" y="6620256"/>
             <a:ext cx="731520" cy="274320"/>
           </a:xfrm>
           <a:prstGeom prst="rect">
@@ -5213,7 +5213,7 @@
         <p:spPr>
           <a:xfrm>
             <a:off x="0" y="0"/>
-            <a:ext cx="12191695" cy="886968"/>
+            <a:ext cx="12191695" cy="658368"/>
           </a:xfrm>
           <a:prstGeom prst="rect">
             <a:avLst/>
@@ -5256,7 +5256,7 @@
         <p:spPr>
           <a:xfrm>
             <a:off x="0" y="0"/>
-            <a:ext cx="54864" cy="886968"/>
+            <a:ext cx="54864" cy="658368"/>
           </a:xfrm>
           <a:prstGeom prst="rect">
             <a:avLst/>
@@ -5298,7 +5298,7 @@
         </p:nvSpPr>
         <p:spPr>
           <a:xfrm>
-            <a:off x="10308031" y="283464"/>
+            <a:off x="10308031" y="169164"/>
             <a:ext cx="1371600" cy="320040"/>
           </a:xfrm>
           <a:prstGeom prst="roundRect">
@@ -5357,7 +5357,7 @@
         </p:nvSpPr>
         <p:spPr>
           <a:xfrm>
-            <a:off x="603504" y="260604"/>
+            <a:off x="603504" y="146304"/>
             <a:ext cx="9613087" cy="457200"/>
           </a:xfrm>
           <a:prstGeom prst="rect">
@@ -5372,7 +5372,7 @@
           <a:lstStyle/>
           <a:p>
             <a:pPr>
-              <a:defRPr sz="2400" b="1">
+              <a:defRPr sz="2000" b="1">
                 <a:solidFill>
                   <a:srgbClr val="FFFFFF"/>
                 </a:solidFill>
@@ -5393,8 +5393,8 @@
         </p:nvSpPr>
         <p:spPr>
           <a:xfrm>
-            <a:off x="512064" y="1325880"/>
-            <a:ext cx="11167567" cy="4837176"/>
+            <a:off x="512064" y="941832"/>
+            <a:ext cx="11167567" cy="5431536"/>
           </a:xfrm>
           <a:prstGeom prst="rect">
             <a:avLst/>
@@ -5409,12 +5409,12 @@
           <a:p>
             <a:pPr>
               <a:lnSpc>
-                <a:spcPct val="130000"/>
+                <a:spcPct val="110000"/>
               </a:lnSpc>
               <a:spcAft>
-                <a:spcPts val="1000"/>
-              </a:spcAft>
-              <a:defRPr sz="2000">
+                <a:spcPts val="400"/>
+              </a:spcAft>
+              <a:defRPr sz="1700">
                 <a:solidFill>
                   <a:srgbClr val="333333"/>
                 </a:solidFill>
@@ -5428,12 +5428,12 @@
           <a:p>
             <a:pPr>
               <a:lnSpc>
-                <a:spcPct val="130000"/>
+                <a:spcPct val="110000"/>
               </a:lnSpc>
               <a:spcAft>
-                <a:spcPts val="1000"/>
-              </a:spcAft>
-              <a:defRPr sz="2000">
+                <a:spcPts val="400"/>
+              </a:spcAft>
+              <a:defRPr sz="1700">
                 <a:solidFill>
                   <a:srgbClr val="333333"/>
                 </a:solidFill>
@@ -5447,12 +5447,12 @@
           <a:p>
             <a:pPr>
               <a:lnSpc>
-                <a:spcPct val="130000"/>
+                <a:spcPct val="110000"/>
               </a:lnSpc>
               <a:spcAft>
-                <a:spcPts val="1000"/>
-              </a:spcAft>
-              <a:defRPr sz="2000">
+                <a:spcPts val="400"/>
+              </a:spcAft>
+              <a:defRPr sz="1700">
                 <a:solidFill>
                   <a:srgbClr val="333333"/>
                 </a:solidFill>
@@ -5466,12 +5466,12 @@
           <a:p>
             <a:pPr>
               <a:lnSpc>
-                <a:spcPct val="130000"/>
+                <a:spcPct val="110000"/>
               </a:lnSpc>
               <a:spcAft>
-                <a:spcPts val="1000"/>
-              </a:spcAft>
-              <a:defRPr sz="2000">
+                <a:spcPts val="400"/>
+              </a:spcAft>
+              <a:defRPr sz="1700">
                 <a:solidFill>
                   <a:srgbClr val="333333"/>
                 </a:solidFill>
@@ -5485,12 +5485,12 @@
           <a:p>
             <a:pPr>
               <a:lnSpc>
-                <a:spcPct val="130000"/>
+                <a:spcPct val="110000"/>
               </a:lnSpc>
               <a:spcAft>
-                <a:spcPts val="1000"/>
-              </a:spcAft>
-              <a:defRPr sz="2000">
+                <a:spcPts val="400"/>
+              </a:spcAft>
+              <a:defRPr sz="1700">
                 <a:solidFill>
                   <a:srgbClr val="333333"/>
                 </a:solidFill>
@@ -5511,7 +5511,7 @@
         </p:nvSpPr>
         <p:spPr>
           <a:xfrm>
-            <a:off x="512064" y="6400800"/>
+            <a:off x="512064" y="6528816"/>
             <a:ext cx="11167567" cy="12700"/>
           </a:xfrm>
           <a:prstGeom prst="rect">
@@ -5554,7 +5554,7 @@
         </p:nvSpPr>
         <p:spPr>
           <a:xfrm>
-            <a:off x="10948111" y="6492240"/>
+            <a:off x="10948111" y="6620256"/>
             <a:ext cx="731520" cy="274320"/>
           </a:xfrm>
           <a:prstGeom prst="rect">
@@ -5712,7 +5712,7 @@
               <a:lnSpc>
                 <a:spcPct val="130000"/>
               </a:lnSpc>
-              <a:defRPr sz="4800" b="1">
+              <a:defRPr sz="4400" b="1">
                 <a:solidFill>
                   <a:srgbClr val="FFFFFF"/>
                 </a:solidFill>
@@ -5733,7 +5733,7 @@
         </p:nvSpPr>
         <p:spPr>
           <a:xfrm>
-            <a:off x="512064" y="3200400"/>
+            <a:off x="512064" y="3108960"/>
             <a:ext cx="11167567" cy="548640"/>
           </a:xfrm>
           <a:prstGeom prst="rect">
@@ -5751,7 +5751,7 @@
               <a:lnSpc>
                 <a:spcPct val="130000"/>
               </a:lnSpc>
-              <a:defRPr sz="2400" b="0">
+              <a:defRPr sz="2100" b="0">
                 <a:solidFill>
                   <a:srgbClr val="E8F4FC"/>
                 </a:solidFill>
@@ -5772,7 +5772,7 @@
         </p:nvSpPr>
         <p:spPr>
           <a:xfrm>
-            <a:off x="512064" y="4114800"/>
+            <a:off x="512064" y="3840480"/>
             <a:ext cx="11167567" cy="1371600"/>
           </a:xfrm>
           <a:prstGeom prst="rect">
@@ -5788,9 +5788,9 @@
           <a:p>
             <a:pPr algn="ctr">
               <a:lnSpc>
-                <a:spcPct val="150000"/>
+                <a:spcPct val="125000"/>
               </a:lnSpc>
-              <a:defRPr sz="1600" b="0">
+              <a:defRPr sz="1400" b="0">
                 <a:solidFill>
                   <a:srgbClr val="CCCCCC"/>
                 </a:solidFill>
@@ -5819,7 +5819,7 @@
         </p:nvSpPr>
         <p:spPr>
           <a:xfrm>
-            <a:off x="512064" y="6400800"/>
+            <a:off x="512064" y="6528816"/>
             <a:ext cx="11167567" cy="12700"/>
           </a:xfrm>
           <a:prstGeom prst="rect">
@@ -5862,7 +5862,7 @@
         </p:nvSpPr>
         <p:spPr>
           <a:xfrm>
-            <a:off x="10948111" y="6492240"/>
+            <a:off x="10948111" y="6620256"/>
             <a:ext cx="731520" cy="274320"/>
           </a:xfrm>
           <a:prstGeom prst="rect">
@@ -5917,7 +5917,7 @@
         <p:spPr>
           <a:xfrm>
             <a:off x="0" y="0"/>
-            <a:ext cx="12191695" cy="886968"/>
+            <a:ext cx="12191695" cy="658368"/>
           </a:xfrm>
           <a:prstGeom prst="rect">
             <a:avLst/>
@@ -5960,7 +5960,7 @@
         <p:spPr>
           <a:xfrm>
             <a:off x="0" y="0"/>
-            <a:ext cx="54864" cy="886968"/>
+            <a:ext cx="54864" cy="658368"/>
           </a:xfrm>
           <a:prstGeom prst="rect">
             <a:avLst/>
@@ -6002,7 +6002,7 @@
         </p:nvSpPr>
         <p:spPr>
           <a:xfrm>
-            <a:off x="10308031" y="283464"/>
+            <a:off x="10308031" y="169164"/>
             <a:ext cx="1371600" cy="320040"/>
           </a:xfrm>
           <a:prstGeom prst="roundRect">
@@ -6061,7 +6061,7 @@
         </p:nvSpPr>
         <p:spPr>
           <a:xfrm>
-            <a:off x="603504" y="260604"/>
+            <a:off x="603504" y="146304"/>
             <a:ext cx="9613087" cy="457200"/>
           </a:xfrm>
           <a:prstGeom prst="rect">
@@ -6076,7 +6076,7 @@
           <a:lstStyle/>
           <a:p>
             <a:pPr>
-              <a:defRPr sz="2400" b="1">
+              <a:defRPr sz="2000" b="1">
                 <a:solidFill>
                   <a:srgbClr val="FFFFFF"/>
                 </a:solidFill>
@@ -6097,8 +6097,8 @@
         </p:nvSpPr>
         <p:spPr>
           <a:xfrm>
-            <a:off x="512064" y="1143000"/>
-            <a:ext cx="2286000" cy="548640"/>
+            <a:off x="512064" y="804672"/>
+            <a:ext cx="2286000" cy="457200"/>
           </a:xfrm>
           <a:prstGeom prst="rect">
             <a:avLst/>
@@ -6115,7 +6115,7 @@
               <a:lnSpc>
                 <a:spcPct val="130000"/>
               </a:lnSpc>
-              <a:defRPr sz="3200" b="1">
+              <a:defRPr sz="2600" b="1">
                 <a:solidFill>
                   <a:srgbClr val="003366"/>
                 </a:solidFill>
@@ -6136,8 +6136,8 @@
         </p:nvSpPr>
         <p:spPr>
           <a:xfrm>
-            <a:off x="512064" y="1965960"/>
-            <a:ext cx="11167567" cy="4105656"/>
+            <a:off x="512064" y="1399032"/>
+            <a:ext cx="5423763" cy="4928616"/>
           </a:xfrm>
           <a:prstGeom prst="rect">
             <a:avLst/>
@@ -6152,9 +6152,9 @@
           <a:p>
             <a:pPr>
               <a:spcAft>
-                <a:spcPts val="400"/>
-              </a:spcAft>
-              <a:defRPr sz="2200" b="1">
+                <a:spcPts val="200"/>
+              </a:spcAft>
+              <a:defRPr sz="1600" b="1">
                 <a:solidFill>
                   <a:srgbClr val="003366"/>
                 </a:solidFill>
@@ -6162,15 +6162,15 @@
               </a:defRPr>
             </a:pPr>
             <a:r>
-              <a:t>01    项目背景与目标</a:t>
+              <a:t>01  项目背景与目标</a:t>
             </a:r>
           </a:p>
           <a:p>
             <a:pPr>
               <a:spcAft>
-                <a:spcPts val="1600"/>
-              </a:spcAft>
-              <a:defRPr sz="1400">
+                <a:spcPts val="1000"/>
+              </a:spcAft>
+              <a:defRPr sz="1100">
                 <a:solidFill>
                   <a:srgbClr val="666666"/>
                 </a:solidFill>
@@ -6178,15 +6178,15 @@
               </a:defRPr>
             </a:pPr>
             <a:r>
-              <a:t>        面向在校大学生的公务员备考跟踪系统</a:t>
+              <a:t>     面向在校大学生的公务员备考跟踪系统</a:t>
             </a:r>
           </a:p>
           <a:p>
             <a:pPr>
               <a:spcAft>
-                <a:spcPts val="400"/>
-              </a:spcAft>
-              <a:defRPr sz="2200" b="1">
+                <a:spcPts val="200"/>
+              </a:spcAft>
+              <a:defRPr sz="1600" b="1">
                 <a:solidFill>
                   <a:srgbClr val="003366"/>
                 </a:solidFill>
@@ -6194,15 +6194,15 @@
               </a:defRPr>
             </a:pPr>
             <a:r>
-              <a:t>02    Week 1 回顾</a:t>
+              <a:t>02  Week 1 回顾</a:t>
             </a:r>
           </a:p>
           <a:p>
             <a:pPr>
               <a:spcAft>
-                <a:spcPts val="1600"/>
-              </a:spcAft>
-              <a:defRPr sz="1400">
+                <a:spcPts val="1000"/>
+              </a:spcAft>
+              <a:defRPr sz="1100">
                 <a:solidFill>
                   <a:srgbClr val="666666"/>
                 </a:solidFill>
@@ -6210,15 +6210,15 @@
               </a:defRPr>
             </a:pPr>
             <a:r>
-              <a:t>        基础设施、数据库、用户与资源模块</a:t>
+              <a:t>     基础设施、数据库、用户与资源模块</a:t>
             </a:r>
           </a:p>
           <a:p>
             <a:pPr>
               <a:spcAft>
-                <a:spcPts val="400"/>
-              </a:spcAft>
-              <a:defRPr sz="2200" b="1">
+                <a:spcPts val="200"/>
+              </a:spcAft>
+              <a:defRPr sz="1600" b="1">
                 <a:solidFill>
                   <a:srgbClr val="003366"/>
                 </a:solidFill>
@@ -6226,15 +6226,15 @@
               </a:defRPr>
             </a:pPr>
             <a:r>
-              <a:t>03    Week 2 回顾</a:t>
+              <a:t>03  Week 2 回顾</a:t>
             </a:r>
           </a:p>
           <a:p>
             <a:pPr>
               <a:spcAft>
-                <a:spcPts val="1600"/>
-              </a:spcAft>
-              <a:defRPr sz="1400">
+                <a:spcPts val="1000"/>
+              </a:spcAft>
+              <a:defRPr sz="1100">
                 <a:solidFill>
                   <a:srgbClr val="666666"/>
                 </a:solidFill>
@@ -6242,15 +6242,15 @@
               </a:defRPr>
             </a:pPr>
             <a:r>
-              <a:t>        题库、计划、统计、推荐、答疑</a:t>
+              <a:t>     题库、计划、统计、推荐、答疑</a:t>
             </a:r>
           </a:p>
           <a:p>
             <a:pPr>
               <a:spcAft>
-                <a:spcPts val="400"/>
-              </a:spcAft>
-              <a:defRPr sz="2200" b="1">
+                <a:spcPts val="200"/>
+              </a:spcAft>
+              <a:defRPr sz="1600" b="1">
                 <a:solidFill>
                   <a:srgbClr val="003366"/>
                 </a:solidFill>
@@ -6258,15 +6258,15 @@
               </a:defRPr>
             </a:pPr>
             <a:r>
-              <a:t>04    Week 3 概览</a:t>
+              <a:t>04  Week 3 概览</a:t>
             </a:r>
           </a:p>
           <a:p>
             <a:pPr>
               <a:spcAft>
-                <a:spcPts val="1600"/>
-              </a:spcAft>
-              <a:defRPr sz="1400">
+                <a:spcPts val="1000"/>
+              </a:spcAft>
+              <a:defRPr sz="1100">
                 <a:solidFill>
                   <a:srgbClr val="666666"/>
                 </a:solidFill>
@@ -6274,15 +6274,38 @@
               </a:defRPr>
             </a:pPr>
             <a:r>
-              <a:t>        UI/UX、测试、文档、最终成果</a:t>
-            </a:r>
-          </a:p>
+              <a:t>     UI/UX、测试、文档、最终成果</a:t>
+            </a:r>
+          </a:p>
+        </p:txBody>
+      </p:sp>
+      <p:sp>
+        <p:nvSpPr>
+          <p:cNvPr id="8" name="TextBox 7"/>
+          <p:cNvSpPr txBox="1"/>
+          <p:nvPr/>
+        </p:nvSpPr>
+        <p:spPr>
+          <a:xfrm>
+            <a:off x="6255867" y="1399032"/>
+            <a:ext cx="5423763" cy="4928616"/>
+          </a:xfrm>
+          <a:prstGeom prst="rect">
+            <a:avLst/>
+          </a:prstGeom>
+          <a:noFill/>
+        </p:spPr>
+        <p:txBody>
+          <a:bodyPr wrap="square">
+            <a:spAutoFit/>
+          </a:bodyPr>
+          <a:lstStyle/>
           <a:p>
             <a:pPr>
               <a:spcAft>
-                <a:spcPts val="400"/>
-              </a:spcAft>
-              <a:defRPr sz="2200" b="1">
+                <a:spcPts val="200"/>
+              </a:spcAft>
+              <a:defRPr sz="1600" b="1">
                 <a:solidFill>
                   <a:srgbClr val="003366"/>
                 </a:solidFill>
@@ -6290,15 +6313,15 @@
               </a:defRPr>
             </a:pPr>
             <a:r>
-              <a:t>05    UI/UX 统一与动画</a:t>
+              <a:t>05  UI/UX 统一与动画</a:t>
             </a:r>
           </a:p>
           <a:p>
             <a:pPr>
               <a:spcAft>
-                <a:spcPts val="1600"/>
-              </a:spcAft>
-              <a:defRPr sz="1400">
+                <a:spcPts val="1000"/>
+              </a:spcAft>
+              <a:defRPr sz="1100">
                 <a:solidFill>
                   <a:srgbClr val="666666"/>
                 </a:solidFill>
@@ -6306,15 +6329,15 @@
               </a:defRPr>
             </a:pPr>
             <a:r>
-              <a:t>        Aceternity 风格与交互体验</a:t>
+              <a:t>     Aceternity 风格与交互体验</a:t>
             </a:r>
           </a:p>
           <a:p>
             <a:pPr>
               <a:spcAft>
-                <a:spcPts val="400"/>
-              </a:spcAft>
-              <a:defRPr sz="2200" b="1">
+                <a:spcPts val="200"/>
+              </a:spcAft>
+              <a:defRPr sz="1600" b="1">
                 <a:solidFill>
                   <a:srgbClr val="003366"/>
                 </a:solidFill>
@@ -6322,15 +6345,15 @@
               </a:defRPr>
             </a:pPr>
             <a:r>
-              <a:t>06    测试与演示数据</a:t>
+              <a:t>06  测试与演示数据</a:t>
             </a:r>
           </a:p>
           <a:p>
             <a:pPr>
               <a:spcAft>
-                <a:spcPts val="1600"/>
-              </a:spcAft>
-              <a:defRPr sz="1400">
+                <a:spcPts val="1000"/>
+              </a:spcAft>
+              <a:defRPr sz="1100">
                 <a:solidFill>
                   <a:srgbClr val="666666"/>
                 </a:solidFill>
@@ -6338,15 +6361,15 @@
               </a:defRPr>
             </a:pPr>
             <a:r>
-              <a:t>        API 冒烟测试与 200 题题库</a:t>
+              <a:t>     API 冒烟测试与 200 题题库</a:t>
             </a:r>
           </a:p>
           <a:p>
             <a:pPr>
               <a:spcAft>
-                <a:spcPts val="400"/>
-              </a:spcAft>
-              <a:defRPr sz="2200" b="1">
+                <a:spcPts val="200"/>
+              </a:spcAft>
+              <a:defRPr sz="1600" b="1">
                 <a:solidFill>
                   <a:srgbClr val="003366"/>
                 </a:solidFill>
@@ -6354,15 +6377,15 @@
               </a:defRPr>
             </a:pPr>
             <a:r>
-              <a:t>07    文档整理与归档</a:t>
+              <a:t>07  文档整理与归档</a:t>
             </a:r>
           </a:p>
           <a:p>
             <a:pPr>
               <a:spcAft>
-                <a:spcPts val="1600"/>
-              </a:spcAft>
-              <a:defRPr sz="1400">
+                <a:spcPts val="1000"/>
+              </a:spcAft>
+              <a:defRPr sz="1100">
                 <a:solidFill>
                   <a:srgbClr val="666666"/>
                 </a:solidFill>
@@ -6370,15 +6393,15 @@
               </a:defRPr>
             </a:pPr>
             <a:r>
-              <a:t>        README、PROJECT_GUIDE、时间线</a:t>
+              <a:t>     README、PROJECT_GUIDE、时间线</a:t>
             </a:r>
           </a:p>
           <a:p>
             <a:pPr>
               <a:spcAft>
-                <a:spcPts val="400"/>
-              </a:spcAft>
-              <a:defRPr sz="2200" b="1">
+                <a:spcPts val="200"/>
+              </a:spcAft>
+              <a:defRPr sz="1600" b="1">
                 <a:solidFill>
                   <a:srgbClr val="003366"/>
                 </a:solidFill>
@@ -6386,15 +6409,15 @@
               </a:defRPr>
             </a:pPr>
             <a:r>
-              <a:t>08    最终成果与展望</a:t>
+              <a:t>08  最终成果与展望</a:t>
             </a:r>
           </a:p>
           <a:p>
             <a:pPr>
               <a:spcAft>
-                <a:spcPts val="1600"/>
-              </a:spcAft>
-              <a:defRPr sz="1400">
+                <a:spcPts val="1000"/>
+              </a:spcAft>
+              <a:defRPr sz="1100">
                 <a:solidFill>
                   <a:srgbClr val="666666"/>
                 </a:solidFill>
@@ -6402,20 +6425,20 @@
               </a:defRPr>
             </a:pPr>
             <a:r>
-              <a:t>        7 大模块 + 可运行系统</a:t>
-            </a:r>
-          </a:p>
-        </p:txBody>
-      </p:sp>
-      <p:sp>
-        <p:nvSpPr>
-          <p:cNvPr id="8" name="Rectangle 7"/>
+              <a:t>     7 大模块 + 可运行系统</a:t>
+            </a:r>
+          </a:p>
+        </p:txBody>
+      </p:sp>
+      <p:sp>
+        <p:nvSpPr>
+          <p:cNvPr id="9" name="Rectangle 8"/>
           <p:cNvSpPr/>
           <p:nvPr/>
         </p:nvSpPr>
         <p:spPr>
           <a:xfrm>
-            <a:off x="512064" y="6400800"/>
+            <a:off x="512064" y="6528816"/>
             <a:ext cx="11167567" cy="12700"/>
           </a:xfrm>
           <a:prstGeom prst="rect">
@@ -6452,13 +6475,13 @@
       </p:sp>
       <p:sp>
         <p:nvSpPr>
-          <p:cNvPr id="9" name="TextBox 8"/>
+          <p:cNvPr id="10" name="TextBox 9"/>
           <p:cNvSpPr txBox="1"/>
           <p:nvPr/>
         </p:nvSpPr>
         <p:spPr>
           <a:xfrm>
-            <a:off x="10948111" y="6492240"/>
+            <a:off x="10948111" y="6620256"/>
             <a:ext cx="731520" cy="274320"/>
           </a:xfrm>
           <a:prstGeom prst="rect">
@@ -6513,7 +6536,7 @@
         <p:spPr>
           <a:xfrm>
             <a:off x="0" y="0"/>
-            <a:ext cx="12191695" cy="886968"/>
+            <a:ext cx="12191695" cy="658368"/>
           </a:xfrm>
           <a:prstGeom prst="rect">
             <a:avLst/>
@@ -6556,7 +6579,7 @@
         <p:spPr>
           <a:xfrm>
             <a:off x="0" y="0"/>
-            <a:ext cx="54864" cy="886968"/>
+            <a:ext cx="54864" cy="658368"/>
           </a:xfrm>
           <a:prstGeom prst="rect">
             <a:avLst/>
@@ -6598,7 +6621,7 @@
         </p:nvSpPr>
         <p:spPr>
           <a:xfrm>
-            <a:off x="10308031" y="283464"/>
+            <a:off x="10308031" y="169164"/>
             <a:ext cx="1371600" cy="320040"/>
           </a:xfrm>
           <a:prstGeom prst="roundRect">
@@ -6657,7 +6680,7 @@
         </p:nvSpPr>
         <p:spPr>
           <a:xfrm>
-            <a:off x="603504" y="260604"/>
+            <a:off x="603504" y="146304"/>
             <a:ext cx="9613087" cy="457200"/>
           </a:xfrm>
           <a:prstGeom prst="rect">
@@ -6672,7 +6695,7 @@
           <a:lstStyle/>
           <a:p>
             <a:pPr>
-              <a:defRPr sz="2400" b="1">
+              <a:defRPr sz="2000" b="1">
                 <a:solidFill>
                   <a:srgbClr val="FFFFFF"/>
                 </a:solidFill>
@@ -6693,8 +6716,8 @@
         </p:nvSpPr>
         <p:spPr>
           <a:xfrm>
-            <a:off x="512064" y="1325880"/>
-            <a:ext cx="11167567" cy="4837176"/>
+            <a:off x="512064" y="941832"/>
+            <a:ext cx="11167567" cy="5431536"/>
           </a:xfrm>
           <a:prstGeom prst="rect">
             <a:avLst/>
@@ -6709,12 +6732,12 @@
           <a:p>
             <a:pPr>
               <a:lnSpc>
-                <a:spcPct val="130000"/>
+                <a:spcPct val="110000"/>
               </a:lnSpc>
               <a:spcAft>
-                <a:spcPts val="1000"/>
-              </a:spcAft>
-              <a:defRPr sz="2000">
+                <a:spcPts val="400"/>
+              </a:spcAft>
+              <a:defRPr sz="1700">
                 <a:solidFill>
                   <a:srgbClr val="333333"/>
                 </a:solidFill>
@@ -6728,12 +6751,12 @@
           <a:p>
             <a:pPr>
               <a:lnSpc>
-                <a:spcPct val="130000"/>
+                <a:spcPct val="110000"/>
               </a:lnSpc>
               <a:spcAft>
-                <a:spcPts val="1000"/>
-              </a:spcAft>
-              <a:defRPr sz="2000">
+                <a:spcPts val="400"/>
+              </a:spcAft>
+              <a:defRPr sz="1700">
                 <a:solidFill>
                   <a:srgbClr val="333333"/>
                 </a:solidFill>
@@ -6747,12 +6770,12 @@
           <a:p>
             <a:pPr>
               <a:lnSpc>
-                <a:spcPct val="130000"/>
+                <a:spcPct val="110000"/>
               </a:lnSpc>
               <a:spcAft>
-                <a:spcPts val="1000"/>
-              </a:spcAft>
-              <a:defRPr sz="2000">
+                <a:spcPts val="400"/>
+              </a:spcAft>
+              <a:defRPr sz="1700">
                 <a:solidFill>
                   <a:srgbClr val="333333"/>
                 </a:solidFill>
@@ -6766,12 +6789,12 @@
           <a:p>
             <a:pPr>
               <a:lnSpc>
-                <a:spcPct val="130000"/>
+                <a:spcPct val="110000"/>
               </a:lnSpc>
               <a:spcAft>
-                <a:spcPts val="1000"/>
-              </a:spcAft>
-              <a:defRPr sz="2000">
+                <a:spcPts val="400"/>
+              </a:spcAft>
+              <a:defRPr sz="1700">
                 <a:solidFill>
                   <a:srgbClr val="333333"/>
                 </a:solidFill>
@@ -6785,12 +6808,12 @@
           <a:p>
             <a:pPr>
               <a:lnSpc>
-                <a:spcPct val="130000"/>
+                <a:spcPct val="110000"/>
               </a:lnSpc>
               <a:spcAft>
-                <a:spcPts val="1000"/>
-              </a:spcAft>
-              <a:defRPr sz="2000">
+                <a:spcPts val="400"/>
+              </a:spcAft>
+              <a:defRPr sz="1700">
                 <a:solidFill>
                   <a:srgbClr val="333333"/>
                 </a:solidFill>
@@ -6811,7 +6834,7 @@
         </p:nvSpPr>
         <p:spPr>
           <a:xfrm>
-            <a:off x="512064" y="6400800"/>
+            <a:off x="512064" y="6528816"/>
             <a:ext cx="11167567" cy="12700"/>
           </a:xfrm>
           <a:prstGeom prst="rect">
@@ -6854,7 +6877,7 @@
         </p:nvSpPr>
         <p:spPr>
           <a:xfrm>
-            <a:off x="10948111" y="6492240"/>
+            <a:off x="10948111" y="6620256"/>
             <a:ext cx="731520" cy="274320"/>
           </a:xfrm>
           <a:prstGeom prst="rect">
@@ -6909,7 +6932,7 @@
         <p:spPr>
           <a:xfrm>
             <a:off x="0" y="0"/>
-            <a:ext cx="12191695" cy="886968"/>
+            <a:ext cx="12191695" cy="658368"/>
           </a:xfrm>
           <a:prstGeom prst="rect">
             <a:avLst/>
@@ -6952,7 +6975,7 @@
         <p:spPr>
           <a:xfrm>
             <a:off x="0" y="0"/>
-            <a:ext cx="54864" cy="886968"/>
+            <a:ext cx="54864" cy="658368"/>
           </a:xfrm>
           <a:prstGeom prst="rect">
             <a:avLst/>
@@ -6994,7 +7017,7 @@
         </p:nvSpPr>
         <p:spPr>
           <a:xfrm>
-            <a:off x="10308031" y="283464"/>
+            <a:off x="10308031" y="169164"/>
             <a:ext cx="1371600" cy="320040"/>
           </a:xfrm>
           <a:prstGeom prst="roundRect">
@@ -7053,7 +7076,7 @@
         </p:nvSpPr>
         <p:spPr>
           <a:xfrm>
-            <a:off x="603504" y="260604"/>
+            <a:off x="603504" y="146304"/>
             <a:ext cx="9613087" cy="457200"/>
           </a:xfrm>
           <a:prstGeom prst="rect">
@@ -7068,7 +7091,7 @@
           <a:lstStyle/>
           <a:p>
             <a:pPr>
-              <a:defRPr sz="2400" b="1">
+              <a:defRPr sz="2000" b="1">
                 <a:solidFill>
                   <a:srgbClr val="FFFFFF"/>
                 </a:solidFill>
@@ -7089,8 +7112,8 @@
         </p:nvSpPr>
         <p:spPr>
           <a:xfrm>
-            <a:off x="512064" y="1508760"/>
-            <a:ext cx="2620441" cy="1463040"/>
+            <a:off x="512064" y="1033272"/>
+            <a:ext cx="2654731" cy="1143000"/>
           </a:xfrm>
           <a:prstGeom prst="roundRect">
             <a:avLst/>
@@ -7122,38 +7145,38 @@
           <a:p>
             <a:pPr algn="ctr">
               <a:spcAft>
+                <a:spcPts val="200"/>
+              </a:spcAft>
+              <a:defRPr sz="3000" b="1">
+                <a:solidFill>
+                  <a:srgbClr val="0066CC"/>
+                </a:solidFill>
+                <a:latin typeface="Microsoft YaHei"/>
+              </a:defRPr>
+            </a:pPr>
+            <a:r>
+              <a:t>11</a:t>
+            </a:r>
+          </a:p>
+          <a:p>
+            <a:pPr algn="ctr">
+              <a:spcAft>
                 <a:spcPts val="400"/>
               </a:spcAft>
-              <a:defRPr sz="3600" b="1">
-                <a:solidFill>
-                  <a:srgbClr val="0066CC"/>
-                </a:solidFill>
-                <a:latin typeface="Microsoft YaHei"/>
-              </a:defRPr>
-            </a:pPr>
-            <a:r>
-              <a:t>11</a:t>
+              <a:defRPr sz="1100">
+                <a:solidFill>
+                  <a:srgbClr val="666666"/>
+                </a:solidFill>
+                <a:latin typeface="Microsoft YaHei"/>
+              </a:defRPr>
+            </a:pPr>
+            <a:r>
+              <a:t>次</a:t>
             </a:r>
           </a:p>
           <a:p>
             <a:pPr algn="ctr">
-              <a:spcAft>
-                <a:spcPts val="800"/>
-              </a:spcAft>
-              <a:defRPr sz="1400">
-                <a:solidFill>
-                  <a:srgbClr val="666666"/>
-                </a:solidFill>
-                <a:latin typeface="Microsoft YaHei"/>
-              </a:defRPr>
-            </a:pPr>
-            <a:r>
-              <a:t>次</a:t>
-            </a:r>
-          </a:p>
-          <a:p>
-            <a:pPr algn="ctr">
-              <a:defRPr sz="1400">
+              <a:defRPr sz="1100">
                 <a:solidFill>
                   <a:srgbClr val="333333"/>
                 </a:solidFill>
@@ -7174,8 +7197,8 @@
         </p:nvSpPr>
         <p:spPr>
           <a:xfrm>
-            <a:off x="3361105" y="1508760"/>
-            <a:ext cx="2620441" cy="1463040"/>
+            <a:off x="3349675" y="1033272"/>
+            <a:ext cx="2654731" cy="1143000"/>
           </a:xfrm>
           <a:prstGeom prst="roundRect">
             <a:avLst/>
@@ -7207,38 +7230,38 @@
           <a:p>
             <a:pPr algn="ctr">
               <a:spcAft>
+                <a:spcPts val="200"/>
+              </a:spcAft>
+              <a:defRPr sz="3000" b="1">
+                <a:solidFill>
+                  <a:srgbClr val="0066CC"/>
+                </a:solidFill>
+                <a:latin typeface="Microsoft YaHei"/>
+              </a:defRPr>
+            </a:pPr>
+            <a:r>
+              <a:t>12</a:t>
+            </a:r>
+          </a:p>
+          <a:p>
+            <a:pPr algn="ctr">
+              <a:spcAft>
                 <a:spcPts val="400"/>
               </a:spcAft>
-              <a:defRPr sz="3600" b="1">
-                <a:solidFill>
-                  <a:srgbClr val="0066CC"/>
-                </a:solidFill>
-                <a:latin typeface="Microsoft YaHei"/>
-              </a:defRPr>
-            </a:pPr>
-            <a:r>
-              <a:t>12</a:t>
+              <a:defRPr sz="1100">
+                <a:solidFill>
+                  <a:srgbClr val="666666"/>
+                </a:solidFill>
+                <a:latin typeface="Microsoft YaHei"/>
+              </a:defRPr>
+            </a:pPr>
+            <a:r>
+              <a:t>张</a:t>
             </a:r>
           </a:p>
           <a:p>
             <a:pPr algn="ctr">
-              <a:spcAft>
-                <a:spcPts val="800"/>
-              </a:spcAft>
-              <a:defRPr sz="1400">
-                <a:solidFill>
-                  <a:srgbClr val="666666"/>
-                </a:solidFill>
-                <a:latin typeface="Microsoft YaHei"/>
-              </a:defRPr>
-            </a:pPr>
-            <a:r>
-              <a:t>张</a:t>
-            </a:r>
-          </a:p>
-          <a:p>
-            <a:pPr algn="ctr">
-              <a:defRPr sz="1400">
+              <a:defRPr sz="1100">
                 <a:solidFill>
                   <a:srgbClr val="333333"/>
                 </a:solidFill>
@@ -7259,8 +7282,8 @@
         </p:nvSpPr>
         <p:spPr>
           <a:xfrm>
-            <a:off x="6210147" y="1508760"/>
-            <a:ext cx="2620441" cy="1463040"/>
+            <a:off x="6187287" y="1033272"/>
+            <a:ext cx="2654731" cy="1143000"/>
           </a:xfrm>
           <a:prstGeom prst="roundRect">
             <a:avLst/>
@@ -7292,38 +7315,38 @@
           <a:p>
             <a:pPr algn="ctr">
               <a:spcAft>
+                <a:spcPts val="200"/>
+              </a:spcAft>
+              <a:defRPr sz="3000" b="1">
+                <a:solidFill>
+                  <a:srgbClr val="0066CC"/>
+                </a:solidFill>
+                <a:latin typeface="Microsoft YaHei"/>
+              </a:defRPr>
+            </a:pPr>
+            <a:r>
+              <a:t>23</a:t>
+            </a:r>
+          </a:p>
+          <a:p>
+            <a:pPr algn="ctr">
+              <a:spcAft>
                 <a:spcPts val="400"/>
               </a:spcAft>
-              <a:defRPr sz="3600" b="1">
-                <a:solidFill>
-                  <a:srgbClr val="0066CC"/>
-                </a:solidFill>
-                <a:latin typeface="Microsoft YaHei"/>
-              </a:defRPr>
-            </a:pPr>
-            <a:r>
-              <a:t>23</a:t>
+              <a:defRPr sz="1100">
+                <a:solidFill>
+                  <a:srgbClr val="666666"/>
+                </a:solidFill>
+                <a:latin typeface="Microsoft YaHei"/>
+              </a:defRPr>
+            </a:pPr>
+            <a:r>
+              <a:t>条</a:t>
             </a:r>
           </a:p>
           <a:p>
             <a:pPr algn="ctr">
-              <a:spcAft>
-                <a:spcPts val="800"/>
-              </a:spcAft>
-              <a:defRPr sz="1400">
-                <a:solidFill>
-                  <a:srgbClr val="666666"/>
-                </a:solidFill>
-                <a:latin typeface="Microsoft YaHei"/>
-              </a:defRPr>
-            </a:pPr>
-            <a:r>
-              <a:t>条</a:t>
-            </a:r>
-          </a:p>
-          <a:p>
-            <a:pPr algn="ctr">
-              <a:defRPr sz="1400">
+              <a:defRPr sz="1100">
                 <a:solidFill>
                   <a:srgbClr val="333333"/>
                 </a:solidFill>
@@ -7344,8 +7367,8 @@
         </p:nvSpPr>
         <p:spPr>
           <a:xfrm>
-            <a:off x="9059189" y="1508760"/>
-            <a:ext cx="2620441" cy="1463040"/>
+            <a:off x="9024899" y="1033272"/>
+            <a:ext cx="2654731" cy="1143000"/>
           </a:xfrm>
           <a:prstGeom prst="roundRect">
             <a:avLst/>
@@ -7377,38 +7400,38 @@
           <a:p>
             <a:pPr algn="ctr">
               <a:spcAft>
+                <a:spcPts val="200"/>
+              </a:spcAft>
+              <a:defRPr sz="3000" b="1">
+                <a:solidFill>
+                  <a:srgbClr val="0066CC"/>
+                </a:solidFill>
+                <a:latin typeface="Microsoft YaHei"/>
+              </a:defRPr>
+            </a:pPr>
+            <a:r>
+              <a:t>2</a:t>
+            </a:r>
+          </a:p>
+          <a:p>
+            <a:pPr algn="ctr">
+              <a:spcAft>
                 <a:spcPts val="400"/>
               </a:spcAft>
-              <a:defRPr sz="3600" b="1">
-                <a:solidFill>
-                  <a:srgbClr val="0066CC"/>
-                </a:solidFill>
-                <a:latin typeface="Microsoft YaHei"/>
-              </a:defRPr>
-            </a:pPr>
-            <a:r>
-              <a:t>2</a:t>
+              <a:defRPr sz="1100">
+                <a:solidFill>
+                  <a:srgbClr val="666666"/>
+                </a:solidFill>
+                <a:latin typeface="Microsoft YaHei"/>
+              </a:defRPr>
+            </a:pPr>
+            <a:r>
+              <a:t>个</a:t>
             </a:r>
           </a:p>
           <a:p>
             <a:pPr algn="ctr">
-              <a:spcAft>
-                <a:spcPts val="800"/>
-              </a:spcAft>
-              <a:defRPr sz="1400">
-                <a:solidFill>
-                  <a:srgbClr val="666666"/>
-                </a:solidFill>
-                <a:latin typeface="Microsoft YaHei"/>
-              </a:defRPr>
-            </a:pPr>
-            <a:r>
-              <a:t>个</a:t>
-            </a:r>
-          </a:p>
-          <a:p>
-            <a:pPr algn="ctr">
-              <a:defRPr sz="1400">
+              <a:defRPr sz="1100">
                 <a:solidFill>
                   <a:srgbClr val="333333"/>
                 </a:solidFill>
@@ -7429,8 +7452,8 @@
         </p:nvSpPr>
         <p:spPr>
           <a:xfrm>
-            <a:off x="512064" y="3154680"/>
-            <a:ext cx="11167567" cy="3008376"/>
+            <a:off x="512064" y="2496312"/>
+            <a:ext cx="11167567" cy="3877056"/>
           </a:xfrm>
           <a:prstGeom prst="rect">
             <a:avLst/>
@@ -7445,12 +7468,12 @@
           <a:p>
             <a:pPr>
               <a:lnSpc>
-                <a:spcPct val="130000"/>
+                <a:spcPct val="110000"/>
               </a:lnSpc>
               <a:spcAft>
-                <a:spcPts val="1000"/>
-              </a:spcAft>
-              <a:defRPr sz="1800">
+                <a:spcPts val="400"/>
+              </a:spcAft>
+              <a:defRPr sz="1700">
                 <a:solidFill>
                   <a:srgbClr val="333333"/>
                 </a:solidFill>
@@ -7464,12 +7487,12 @@
           <a:p>
             <a:pPr>
               <a:lnSpc>
-                <a:spcPct val="130000"/>
+                <a:spcPct val="110000"/>
               </a:lnSpc>
               <a:spcAft>
-                <a:spcPts val="1000"/>
-              </a:spcAft>
-              <a:defRPr sz="1800">
+                <a:spcPts val="400"/>
+              </a:spcAft>
+              <a:defRPr sz="1700">
                 <a:solidFill>
                   <a:srgbClr val="333333"/>
                 </a:solidFill>
@@ -7483,12 +7506,12 @@
           <a:p>
             <a:pPr>
               <a:lnSpc>
-                <a:spcPct val="130000"/>
+                <a:spcPct val="110000"/>
               </a:lnSpc>
               <a:spcAft>
-                <a:spcPts val="1000"/>
-              </a:spcAft>
-              <a:defRPr sz="1800">
+                <a:spcPts val="400"/>
+              </a:spcAft>
+              <a:defRPr sz="1700">
                 <a:solidFill>
                   <a:srgbClr val="333333"/>
                 </a:solidFill>
@@ -7502,12 +7525,12 @@
           <a:p>
             <a:pPr>
               <a:lnSpc>
-                <a:spcPct val="130000"/>
+                <a:spcPct val="110000"/>
               </a:lnSpc>
               <a:spcAft>
-                <a:spcPts val="1000"/>
-              </a:spcAft>
-              <a:defRPr sz="1800">
+                <a:spcPts val="400"/>
+              </a:spcAft>
+              <a:defRPr sz="1700">
                 <a:solidFill>
                   <a:srgbClr val="333333"/>
                 </a:solidFill>
@@ -7528,7 +7551,7 @@
         </p:nvSpPr>
         <p:spPr>
           <a:xfrm>
-            <a:off x="512064" y="6400800"/>
+            <a:off x="512064" y="6528816"/>
             <a:ext cx="11167567" cy="12700"/>
           </a:xfrm>
           <a:prstGeom prst="rect">
@@ -7571,7 +7594,7 @@
         </p:nvSpPr>
         <p:spPr>
           <a:xfrm>
-            <a:off x="10948111" y="6492240"/>
+            <a:off x="10948111" y="6620256"/>
             <a:ext cx="731520" cy="274320"/>
           </a:xfrm>
           <a:prstGeom prst="rect">
@@ -7626,7 +7649,7 @@
         <p:spPr>
           <a:xfrm>
             <a:off x="0" y="0"/>
-            <a:ext cx="12191695" cy="886968"/>
+            <a:ext cx="12191695" cy="658368"/>
           </a:xfrm>
           <a:prstGeom prst="rect">
             <a:avLst/>
@@ -7669,7 +7692,7 @@
         <p:spPr>
           <a:xfrm>
             <a:off x="0" y="0"/>
-            <a:ext cx="54864" cy="886968"/>
+            <a:ext cx="54864" cy="658368"/>
           </a:xfrm>
           <a:prstGeom prst="rect">
             <a:avLst/>
@@ -7711,7 +7734,7 @@
         </p:nvSpPr>
         <p:spPr>
           <a:xfrm>
-            <a:off x="10308031" y="283464"/>
+            <a:off x="10308031" y="169164"/>
             <a:ext cx="1371600" cy="320040"/>
           </a:xfrm>
           <a:prstGeom prst="roundRect">
@@ -7770,7 +7793,7 @@
         </p:nvSpPr>
         <p:spPr>
           <a:xfrm>
-            <a:off x="603504" y="260604"/>
+            <a:off x="603504" y="146304"/>
             <a:ext cx="9613087" cy="457200"/>
           </a:xfrm>
           <a:prstGeom prst="rect">
@@ -7785,7 +7808,7 @@
           <a:lstStyle/>
           <a:p>
             <a:pPr>
-              <a:defRPr sz="2400" b="1">
+              <a:defRPr sz="2000" b="1">
                 <a:solidFill>
                   <a:srgbClr val="FFFFFF"/>
                 </a:solidFill>
@@ -7806,8 +7829,8 @@
         </p:nvSpPr>
         <p:spPr>
           <a:xfrm>
-            <a:off x="512064" y="1508760"/>
-            <a:ext cx="2620441" cy="1463040"/>
+            <a:off x="512064" y="1033272"/>
+            <a:ext cx="2654731" cy="1143000"/>
           </a:xfrm>
           <a:prstGeom prst="roundRect">
             <a:avLst/>
@@ -7839,38 +7862,38 @@
           <a:p>
             <a:pPr algn="ctr">
               <a:spcAft>
+                <a:spcPts val="200"/>
+              </a:spcAft>
+              <a:defRPr sz="3000" b="1">
+                <a:solidFill>
+                  <a:srgbClr val="0066CC"/>
+                </a:solidFill>
+                <a:latin typeface="Microsoft YaHei"/>
+              </a:defRPr>
+            </a:pPr>
+            <a:r>
+              <a:t>200</a:t>
+            </a:r>
+          </a:p>
+          <a:p>
+            <a:pPr algn="ctr">
+              <a:spcAft>
                 <a:spcPts val="400"/>
               </a:spcAft>
-              <a:defRPr sz="3600" b="1">
-                <a:solidFill>
-                  <a:srgbClr val="0066CC"/>
-                </a:solidFill>
-                <a:latin typeface="Microsoft YaHei"/>
-              </a:defRPr>
-            </a:pPr>
-            <a:r>
-              <a:t>200</a:t>
+              <a:defRPr sz="1100">
+                <a:solidFill>
+                  <a:srgbClr val="666666"/>
+                </a:solidFill>
+                <a:latin typeface="Microsoft YaHei"/>
+              </a:defRPr>
+            </a:pPr>
+            <a:r>
+              <a:t>题</a:t>
             </a:r>
           </a:p>
           <a:p>
             <a:pPr algn="ctr">
-              <a:spcAft>
-                <a:spcPts val="800"/>
-              </a:spcAft>
-              <a:defRPr sz="1400">
-                <a:solidFill>
-                  <a:srgbClr val="666666"/>
-                </a:solidFill>
-                <a:latin typeface="Microsoft YaHei"/>
-              </a:defRPr>
-            </a:pPr>
-            <a:r>
-              <a:t>题</a:t>
-            </a:r>
-          </a:p>
-          <a:p>
-            <a:pPr algn="ctr">
-              <a:defRPr sz="1400">
+              <a:defRPr sz="1100">
                 <a:solidFill>
                   <a:srgbClr val="333333"/>
                 </a:solidFill>
@@ -7891,8 +7914,8 @@
         </p:nvSpPr>
         <p:spPr>
           <a:xfrm>
-            <a:off x="3361105" y="1508760"/>
-            <a:ext cx="2620441" cy="1463040"/>
+            <a:off x="3349675" y="1033272"/>
+            <a:ext cx="2654731" cy="1143000"/>
           </a:xfrm>
           <a:prstGeom prst="roundRect">
             <a:avLst/>
@@ -7924,38 +7947,38 @@
           <a:p>
             <a:pPr algn="ctr">
               <a:spcAft>
+                <a:spcPts val="200"/>
+              </a:spcAft>
+              <a:defRPr sz="3000" b="1">
+                <a:solidFill>
+                  <a:srgbClr val="0066CC"/>
+                </a:solidFill>
+                <a:latin typeface="Microsoft YaHei"/>
+              </a:defRPr>
+            </a:pPr>
+            <a:r>
+              <a:t>6</a:t>
+            </a:r>
+          </a:p>
+          <a:p>
+            <a:pPr algn="ctr">
+              <a:spcAft>
                 <a:spcPts val="400"/>
               </a:spcAft>
-              <a:defRPr sz="3600" b="1">
-                <a:solidFill>
-                  <a:srgbClr val="0066CC"/>
-                </a:solidFill>
-                <a:latin typeface="Microsoft YaHei"/>
-              </a:defRPr>
-            </a:pPr>
-            <a:r>
-              <a:t>6</a:t>
+              <a:defRPr sz="1100">
+                <a:solidFill>
+                  <a:srgbClr val="666666"/>
+                </a:solidFill>
+                <a:latin typeface="Microsoft YaHei"/>
+              </a:defRPr>
+            </a:pPr>
+            <a:r>
+              <a:t>个</a:t>
             </a:r>
           </a:p>
           <a:p>
             <a:pPr algn="ctr">
-              <a:spcAft>
-                <a:spcPts val="800"/>
-              </a:spcAft>
-              <a:defRPr sz="1400">
-                <a:solidFill>
-                  <a:srgbClr val="666666"/>
-                </a:solidFill>
-                <a:latin typeface="Microsoft YaHei"/>
-              </a:defRPr>
-            </a:pPr>
-            <a:r>
-              <a:t>个</a:t>
-            </a:r>
-          </a:p>
-          <a:p>
-            <a:pPr algn="ctr">
-              <a:defRPr sz="1400">
+              <a:defRPr sz="1100">
                 <a:solidFill>
                   <a:srgbClr val="333333"/>
                 </a:solidFill>
@@ -7976,8 +7999,8 @@
         </p:nvSpPr>
         <p:spPr>
           <a:xfrm>
-            <a:off x="6210147" y="1508760"/>
-            <a:ext cx="2620441" cy="1463040"/>
+            <a:off x="6187287" y="1033272"/>
+            <a:ext cx="2654731" cy="1143000"/>
           </a:xfrm>
           <a:prstGeom prst="roundRect">
             <a:avLst/>
@@ -8009,38 +8032,38 @@
           <a:p>
             <a:pPr algn="ctr">
               <a:spcAft>
+                <a:spcPts val="200"/>
+              </a:spcAft>
+              <a:defRPr sz="3000" b="1">
+                <a:solidFill>
+                  <a:srgbClr val="0066CC"/>
+                </a:solidFill>
+                <a:latin typeface="Microsoft YaHei"/>
+              </a:defRPr>
+            </a:pPr>
+            <a:r>
+              <a:t>10</a:t>
+            </a:r>
+          </a:p>
+          <a:p>
+            <a:pPr algn="ctr">
+              <a:spcAft>
                 <a:spcPts val="400"/>
               </a:spcAft>
-              <a:defRPr sz="3600" b="1">
-                <a:solidFill>
-                  <a:srgbClr val="0066CC"/>
-                </a:solidFill>
-                <a:latin typeface="Microsoft YaHei"/>
-              </a:defRPr>
-            </a:pPr>
-            <a:r>
-              <a:t>10</a:t>
+              <a:defRPr sz="1100">
+                <a:solidFill>
+                  <a:srgbClr val="666666"/>
+                </a:solidFill>
+                <a:latin typeface="Microsoft YaHei"/>
+              </a:defRPr>
+            </a:pPr>
+            <a:r>
+              <a:t>个</a:t>
             </a:r>
           </a:p>
           <a:p>
             <a:pPr algn="ctr">
-              <a:spcAft>
-                <a:spcPts val="800"/>
-              </a:spcAft>
-              <a:defRPr sz="1400">
-                <a:solidFill>
-                  <a:srgbClr val="666666"/>
-                </a:solidFill>
-                <a:latin typeface="Microsoft YaHei"/>
-              </a:defRPr>
-            </a:pPr>
-            <a:r>
-              <a:t>个</a:t>
-            </a:r>
-          </a:p>
-          <a:p>
-            <a:pPr algn="ctr">
-              <a:defRPr sz="1400">
+              <a:defRPr sz="1100">
                 <a:solidFill>
                   <a:srgbClr val="333333"/>
                 </a:solidFill>
@@ -8061,8 +8084,8 @@
         </p:nvSpPr>
         <p:spPr>
           <a:xfrm>
-            <a:off x="9059189" y="1508760"/>
-            <a:ext cx="2620441" cy="1463040"/>
+            <a:off x="9024899" y="1033272"/>
+            <a:ext cx="2654731" cy="1143000"/>
           </a:xfrm>
           <a:prstGeom prst="roundRect">
             <a:avLst/>
@@ -8094,38 +8117,38 @@
           <a:p>
             <a:pPr algn="ctr">
               <a:spcAft>
+                <a:spcPts val="200"/>
+              </a:spcAft>
+              <a:defRPr sz="3000" b="1">
+                <a:solidFill>
+                  <a:srgbClr val="0066CC"/>
+                </a:solidFill>
+                <a:latin typeface="Microsoft YaHei"/>
+              </a:defRPr>
+            </a:pPr>
+            <a:r>
+              <a:t>≈75</a:t>
+            </a:r>
+          </a:p>
+          <a:p>
+            <a:pPr algn="ctr">
+              <a:spcAft>
                 <a:spcPts val="400"/>
               </a:spcAft>
-              <a:defRPr sz="3600" b="1">
-                <a:solidFill>
-                  <a:srgbClr val="0066CC"/>
-                </a:solidFill>
-                <a:latin typeface="Microsoft YaHei"/>
-              </a:defRPr>
-            </a:pPr>
-            <a:r>
-              <a:t>≈75</a:t>
+              <a:defRPr sz="1100">
+                <a:solidFill>
+                  <a:srgbClr val="666666"/>
+                </a:solidFill>
+                <a:latin typeface="Microsoft YaHei"/>
+              </a:defRPr>
+            </a:pPr>
+            <a:r>
+              <a:t>%</a:t>
             </a:r>
           </a:p>
           <a:p>
             <a:pPr algn="ctr">
-              <a:spcAft>
-                <a:spcPts val="800"/>
-              </a:spcAft>
-              <a:defRPr sz="1400">
-                <a:solidFill>
-                  <a:srgbClr val="666666"/>
-                </a:solidFill>
-                <a:latin typeface="Microsoft YaHei"/>
-              </a:defRPr>
-            </a:pPr>
-            <a:r>
-              <a:t>%</a:t>
-            </a:r>
-          </a:p>
-          <a:p>
-            <a:pPr algn="ctr">
-              <a:defRPr sz="1400">
+              <a:defRPr sz="1100">
                 <a:solidFill>
                   <a:srgbClr val="333333"/>
                 </a:solidFill>
@@ -8146,8 +8169,8 @@
         </p:nvSpPr>
         <p:spPr>
           <a:xfrm>
-            <a:off x="512064" y="3154680"/>
-            <a:ext cx="11167567" cy="3008376"/>
+            <a:off x="512064" y="2496312"/>
+            <a:ext cx="11167567" cy="3877056"/>
           </a:xfrm>
           <a:prstGeom prst="rect">
             <a:avLst/>
@@ -8162,12 +8185,12 @@
           <a:p>
             <a:pPr>
               <a:lnSpc>
-                <a:spcPct val="130000"/>
+                <a:spcPct val="110000"/>
               </a:lnSpc>
               <a:spcAft>
-                <a:spcPts val="1000"/>
-              </a:spcAft>
-              <a:defRPr sz="1800">
+                <a:spcPts val="400"/>
+              </a:spcAft>
+              <a:defRPr sz="1700">
                 <a:solidFill>
                   <a:srgbClr val="333333"/>
                 </a:solidFill>
@@ -8181,12 +8204,12 @@
           <a:p>
             <a:pPr>
               <a:lnSpc>
-                <a:spcPct val="130000"/>
+                <a:spcPct val="110000"/>
               </a:lnSpc>
               <a:spcAft>
-                <a:spcPts val="1000"/>
-              </a:spcAft>
-              <a:defRPr sz="1800">
+                <a:spcPts val="400"/>
+              </a:spcAft>
+              <a:defRPr sz="1700">
                 <a:solidFill>
                   <a:srgbClr val="333333"/>
                 </a:solidFill>
@@ -8200,12 +8223,12 @@
           <a:p>
             <a:pPr>
               <a:lnSpc>
-                <a:spcPct val="130000"/>
+                <a:spcPct val="110000"/>
               </a:lnSpc>
               <a:spcAft>
-                <a:spcPts val="1000"/>
-              </a:spcAft>
-              <a:defRPr sz="1800">
+                <a:spcPts val="400"/>
+              </a:spcAft>
+              <a:defRPr sz="1700">
                 <a:solidFill>
                   <a:srgbClr val="333333"/>
                 </a:solidFill>
@@ -8219,12 +8242,12 @@
           <a:p>
             <a:pPr>
               <a:lnSpc>
-                <a:spcPct val="130000"/>
+                <a:spcPct val="110000"/>
               </a:lnSpc>
               <a:spcAft>
-                <a:spcPts val="1000"/>
-              </a:spcAft>
-              <a:defRPr sz="1800">
+                <a:spcPts val="400"/>
+              </a:spcAft>
+              <a:defRPr sz="1700">
                 <a:solidFill>
                   <a:srgbClr val="333333"/>
                 </a:solidFill>
@@ -8245,7 +8268,7 @@
         </p:nvSpPr>
         <p:spPr>
           <a:xfrm>
-            <a:off x="512064" y="6400800"/>
+            <a:off x="512064" y="6528816"/>
             <a:ext cx="11167567" cy="12700"/>
           </a:xfrm>
           <a:prstGeom prst="rect">
@@ -8288,7 +8311,7 @@
         </p:nvSpPr>
         <p:spPr>
           <a:xfrm>
-            <a:off x="10948111" y="6492240"/>
+            <a:off x="10948111" y="6620256"/>
             <a:ext cx="731520" cy="274320"/>
           </a:xfrm>
           <a:prstGeom prst="rect">
@@ -8343,7 +8366,7 @@
         <p:spPr>
           <a:xfrm>
             <a:off x="0" y="0"/>
-            <a:ext cx="12191695" cy="886968"/>
+            <a:ext cx="12191695" cy="658368"/>
           </a:xfrm>
           <a:prstGeom prst="rect">
             <a:avLst/>
@@ -8386,7 +8409,7 @@
         <p:spPr>
           <a:xfrm>
             <a:off x="0" y="0"/>
-            <a:ext cx="54864" cy="886968"/>
+            <a:ext cx="54864" cy="658368"/>
           </a:xfrm>
           <a:prstGeom prst="rect">
             <a:avLst/>
@@ -8428,7 +8451,7 @@
         </p:nvSpPr>
         <p:spPr>
           <a:xfrm>
-            <a:off x="10308031" y="283464"/>
+            <a:off x="10308031" y="169164"/>
             <a:ext cx="1371600" cy="320040"/>
           </a:xfrm>
           <a:prstGeom prst="roundRect">
@@ -8487,7 +8510,7 @@
         </p:nvSpPr>
         <p:spPr>
           <a:xfrm>
-            <a:off x="603504" y="260604"/>
+            <a:off x="603504" y="146304"/>
             <a:ext cx="9613087" cy="457200"/>
           </a:xfrm>
           <a:prstGeom prst="rect">
@@ -8502,7 +8525,7 @@
           <a:lstStyle/>
           <a:p>
             <a:pPr>
-              <a:defRPr sz="2400" b="1">
+              <a:defRPr sz="2000" b="1">
                 <a:solidFill>
                   <a:srgbClr val="FFFFFF"/>
                 </a:solidFill>
@@ -8523,8 +8546,8 @@
         </p:nvSpPr>
         <p:spPr>
           <a:xfrm>
-            <a:off x="512064" y="1508760"/>
-            <a:ext cx="2620441" cy="1463040"/>
+            <a:off x="512064" y="1033272"/>
+            <a:ext cx="2654731" cy="1143000"/>
           </a:xfrm>
           <a:prstGeom prst="roundRect">
             <a:avLst/>
@@ -8556,38 +8579,38 @@
           <a:p>
             <a:pPr algn="ctr">
               <a:spcAft>
+                <a:spcPts val="200"/>
+              </a:spcAft>
+              <a:defRPr sz="3000" b="1">
+                <a:solidFill>
+                  <a:srgbClr val="0066CC"/>
+                </a:solidFill>
+                <a:latin typeface="Microsoft YaHei"/>
+              </a:defRPr>
+            </a:pPr>
+            <a:r>
+              <a:t>42</a:t>
+            </a:r>
+          </a:p>
+          <a:p>
+            <a:pPr algn="ctr">
+              <a:spcAft>
                 <a:spcPts val="400"/>
               </a:spcAft>
-              <a:defRPr sz="3600" b="1">
-                <a:solidFill>
-                  <a:srgbClr val="0066CC"/>
-                </a:solidFill>
-                <a:latin typeface="Microsoft YaHei"/>
-              </a:defRPr>
-            </a:pPr>
-            <a:r>
-              <a:t>42</a:t>
+              <a:defRPr sz="1100">
+                <a:solidFill>
+                  <a:srgbClr val="666666"/>
+                </a:solidFill>
+                <a:latin typeface="Microsoft YaHei"/>
+              </a:defRPr>
+            </a:pPr>
+            <a:r>
+              <a:t>次</a:t>
             </a:r>
           </a:p>
           <a:p>
             <a:pPr algn="ctr">
-              <a:spcAft>
-                <a:spcPts val="800"/>
-              </a:spcAft>
-              <a:defRPr sz="1400">
-                <a:solidFill>
-                  <a:srgbClr val="666666"/>
-                </a:solidFill>
-                <a:latin typeface="Microsoft YaHei"/>
-              </a:defRPr>
-            </a:pPr>
-            <a:r>
-              <a:t>次</a:t>
-            </a:r>
-          </a:p>
-          <a:p>
-            <a:pPr algn="ctr">
-              <a:defRPr sz="1400">
+              <a:defRPr sz="1100">
                 <a:solidFill>
                   <a:srgbClr val="333333"/>
                 </a:solidFill>
@@ -8608,8 +8631,8 @@
         </p:nvSpPr>
         <p:spPr>
           <a:xfrm>
-            <a:off x="3361105" y="1508760"/>
-            <a:ext cx="2620441" cy="1463040"/>
+            <a:off x="3349675" y="1033272"/>
+            <a:ext cx="2654731" cy="1143000"/>
           </a:xfrm>
           <a:prstGeom prst="roundRect">
             <a:avLst/>
@@ -8641,38 +8664,38 @@
           <a:p>
             <a:pPr algn="ctr">
               <a:spcAft>
+                <a:spcPts val="200"/>
+              </a:spcAft>
+              <a:defRPr sz="3000" b="1">
+                <a:solidFill>
+                  <a:srgbClr val="0066CC"/>
+                </a:solidFill>
+                <a:latin typeface="Microsoft YaHei"/>
+              </a:defRPr>
+            </a:pPr>
+            <a:r>
+              <a:t>109</a:t>
+            </a:r>
+          </a:p>
+          <a:p>
+            <a:pPr algn="ctr">
+              <a:spcAft>
                 <a:spcPts val="400"/>
               </a:spcAft>
-              <a:defRPr sz="3600" b="1">
-                <a:solidFill>
-                  <a:srgbClr val="0066CC"/>
-                </a:solidFill>
-                <a:latin typeface="Microsoft YaHei"/>
-              </a:defRPr>
-            </a:pPr>
-            <a:r>
-              <a:t>109</a:t>
+              <a:defRPr sz="1100">
+                <a:solidFill>
+                  <a:srgbClr val="666666"/>
+                </a:solidFill>
+                <a:latin typeface="Microsoft YaHei"/>
+              </a:defRPr>
+            </a:pPr>
+            <a:r>
+              <a:t>个</a:t>
             </a:r>
           </a:p>
           <a:p>
             <a:pPr algn="ctr">
-              <a:spcAft>
-                <a:spcPts val="800"/>
-              </a:spcAft>
-              <a:defRPr sz="1400">
-                <a:solidFill>
-                  <a:srgbClr val="666666"/>
-                </a:solidFill>
-                <a:latin typeface="Microsoft YaHei"/>
-              </a:defRPr>
-            </a:pPr>
-            <a:r>
-              <a:t>个</a:t>
-            </a:r>
-          </a:p>
-          <a:p>
-            <a:pPr algn="ctr">
-              <a:defRPr sz="1400">
+              <a:defRPr sz="1100">
                 <a:solidFill>
                   <a:srgbClr val="333333"/>
                 </a:solidFill>
@@ -8693,8 +8716,8 @@
         </p:nvSpPr>
         <p:spPr>
           <a:xfrm>
-            <a:off x="6210147" y="1508760"/>
-            <a:ext cx="2620441" cy="1463040"/>
+            <a:off x="6187287" y="1033272"/>
+            <a:ext cx="2654731" cy="1143000"/>
           </a:xfrm>
           <a:prstGeom prst="roundRect">
             <a:avLst/>
@@ -8726,38 +8749,38 @@
           <a:p>
             <a:pPr algn="ctr">
               <a:spcAft>
+                <a:spcPts val="200"/>
+              </a:spcAft>
+              <a:defRPr sz="3000" b="1">
+                <a:solidFill>
+                  <a:srgbClr val="0066CC"/>
+                </a:solidFill>
+                <a:latin typeface="Microsoft YaHei"/>
+              </a:defRPr>
+            </a:pPr>
+            <a:r>
+              <a:t>18+</a:t>
+            </a:r>
+          </a:p>
+          <a:p>
+            <a:pPr algn="ctr">
+              <a:spcAft>
                 <a:spcPts val="400"/>
               </a:spcAft>
-              <a:defRPr sz="3600" b="1">
-                <a:solidFill>
-                  <a:srgbClr val="0066CC"/>
-                </a:solidFill>
-                <a:latin typeface="Microsoft YaHei"/>
-              </a:defRPr>
-            </a:pPr>
-            <a:r>
-              <a:t>18+</a:t>
+              <a:defRPr sz="1100">
+                <a:solidFill>
+                  <a:srgbClr val="666666"/>
+                </a:solidFill>
+                <a:latin typeface="Microsoft YaHei"/>
+              </a:defRPr>
+            </a:pPr>
+            <a:r>
+              <a:t>个</a:t>
             </a:r>
           </a:p>
           <a:p>
             <a:pPr algn="ctr">
-              <a:spcAft>
-                <a:spcPts val="800"/>
-              </a:spcAft>
-              <a:defRPr sz="1400">
-                <a:solidFill>
-                  <a:srgbClr val="666666"/>
-                </a:solidFill>
-                <a:latin typeface="Microsoft YaHei"/>
-              </a:defRPr>
-            </a:pPr>
-            <a:r>
-              <a:t>个</a:t>
-            </a:r>
-          </a:p>
-          <a:p>
-            <a:pPr algn="ctr">
-              <a:defRPr sz="1400">
+              <a:defRPr sz="1100">
                 <a:solidFill>
                   <a:srgbClr val="333333"/>
                 </a:solidFill>
@@ -8778,8 +8801,8 @@
         </p:nvSpPr>
         <p:spPr>
           <a:xfrm>
-            <a:off x="9059189" y="1508760"/>
-            <a:ext cx="2620441" cy="1463040"/>
+            <a:off x="9024899" y="1033272"/>
+            <a:ext cx="2654731" cy="1143000"/>
           </a:xfrm>
           <a:prstGeom prst="roundRect">
             <a:avLst/>
@@ -8811,38 +8834,38 @@
           <a:p>
             <a:pPr algn="ctr">
               <a:spcAft>
+                <a:spcPts val="200"/>
+              </a:spcAft>
+              <a:defRPr sz="3000" b="1">
+                <a:solidFill>
+                  <a:srgbClr val="0066CC"/>
+                </a:solidFill>
+                <a:latin typeface="Microsoft YaHei"/>
+              </a:defRPr>
+            </a:pPr>
+            <a:r>
+              <a:t>100</a:t>
+            </a:r>
+          </a:p>
+          <a:p>
+            <a:pPr algn="ctr">
+              <a:spcAft>
                 <a:spcPts val="400"/>
               </a:spcAft>
-              <a:defRPr sz="3600" b="1">
-                <a:solidFill>
-                  <a:srgbClr val="0066CC"/>
-                </a:solidFill>
-                <a:latin typeface="Microsoft YaHei"/>
-              </a:defRPr>
-            </a:pPr>
-            <a:r>
-              <a:t>100</a:t>
+              <a:defRPr sz="1100">
+                <a:solidFill>
+                  <a:srgbClr val="666666"/>
+                </a:solidFill>
+                <a:latin typeface="Microsoft YaHei"/>
+              </a:defRPr>
+            </a:pPr>
+            <a:r>
+              <a:t>%</a:t>
             </a:r>
           </a:p>
           <a:p>
             <a:pPr algn="ctr">
-              <a:spcAft>
-                <a:spcPts val="800"/>
-              </a:spcAft>
-              <a:defRPr sz="1400">
-                <a:solidFill>
-                  <a:srgbClr val="666666"/>
-                </a:solidFill>
-                <a:latin typeface="Microsoft YaHei"/>
-              </a:defRPr>
-            </a:pPr>
-            <a:r>
-              <a:t>%</a:t>
-            </a:r>
-          </a:p>
-          <a:p>
-            <a:pPr algn="ctr">
-              <a:defRPr sz="1400">
+              <a:defRPr sz="1100">
                 <a:solidFill>
                   <a:srgbClr val="333333"/>
                 </a:solidFill>
@@ -8863,8 +8886,8 @@
         </p:nvSpPr>
         <p:spPr>
           <a:xfrm>
-            <a:off x="512064" y="3154680"/>
-            <a:ext cx="11167567" cy="3008376"/>
+            <a:off x="512064" y="2496312"/>
+            <a:ext cx="11167567" cy="3877056"/>
           </a:xfrm>
           <a:prstGeom prst="rect">
             <a:avLst/>
@@ -8879,12 +8902,12 @@
           <a:p>
             <a:pPr>
               <a:lnSpc>
-                <a:spcPct val="130000"/>
+                <a:spcPct val="110000"/>
               </a:lnSpc>
               <a:spcAft>
-                <a:spcPts val="1000"/>
-              </a:spcAft>
-              <a:defRPr sz="1800">
+                <a:spcPts val="400"/>
+              </a:spcAft>
+              <a:defRPr sz="1700">
                 <a:solidFill>
                   <a:srgbClr val="333333"/>
                 </a:solidFill>
@@ -8898,12 +8921,12 @@
           <a:p>
             <a:pPr>
               <a:lnSpc>
-                <a:spcPct val="130000"/>
+                <a:spcPct val="110000"/>
               </a:lnSpc>
               <a:spcAft>
-                <a:spcPts val="1000"/>
-              </a:spcAft>
-              <a:defRPr sz="1800">
+                <a:spcPts val="400"/>
+              </a:spcAft>
+              <a:defRPr sz="1700">
                 <a:solidFill>
                   <a:srgbClr val="333333"/>
                 </a:solidFill>
@@ -8917,12 +8940,12 @@
           <a:p>
             <a:pPr>
               <a:lnSpc>
-                <a:spcPct val="130000"/>
+                <a:spcPct val="110000"/>
               </a:lnSpc>
               <a:spcAft>
-                <a:spcPts val="1000"/>
-              </a:spcAft>
-              <a:defRPr sz="1800">
+                <a:spcPts val="400"/>
+              </a:spcAft>
+              <a:defRPr sz="1700">
                 <a:solidFill>
                   <a:srgbClr val="333333"/>
                 </a:solidFill>
@@ -8936,12 +8959,12 @@
           <a:p>
             <a:pPr>
               <a:lnSpc>
-                <a:spcPct val="130000"/>
+                <a:spcPct val="110000"/>
               </a:lnSpc>
               <a:spcAft>
-                <a:spcPts val="1000"/>
-              </a:spcAft>
-              <a:defRPr sz="1800">
+                <a:spcPts val="400"/>
+              </a:spcAft>
+              <a:defRPr sz="1700">
                 <a:solidFill>
                   <a:srgbClr val="333333"/>
                 </a:solidFill>
@@ -8955,12 +8978,12 @@
           <a:p>
             <a:pPr>
               <a:lnSpc>
-                <a:spcPct val="130000"/>
+                <a:spcPct val="110000"/>
               </a:lnSpc>
               <a:spcAft>
-                <a:spcPts val="1000"/>
-              </a:spcAft>
-              <a:defRPr sz="1800">
+                <a:spcPts val="400"/>
+              </a:spcAft>
+              <a:defRPr sz="1700">
                 <a:solidFill>
                   <a:srgbClr val="333333"/>
                 </a:solidFill>
@@ -8981,7 +9004,7 @@
         </p:nvSpPr>
         <p:spPr>
           <a:xfrm>
-            <a:off x="512064" y="6400800"/>
+            <a:off x="512064" y="6528816"/>
             <a:ext cx="11167567" cy="12700"/>
           </a:xfrm>
           <a:prstGeom prst="rect">
@@ -9024,7 +9047,7 @@
         </p:nvSpPr>
         <p:spPr>
           <a:xfrm>
-            <a:off x="10948111" y="6492240"/>
+            <a:off x="10948111" y="6620256"/>
             <a:ext cx="731520" cy="274320"/>
           </a:xfrm>
           <a:prstGeom prst="rect">
@@ -9079,7 +9102,7 @@
         <p:spPr>
           <a:xfrm>
             <a:off x="0" y="0"/>
-            <a:ext cx="12191695" cy="886968"/>
+            <a:ext cx="12191695" cy="658368"/>
           </a:xfrm>
           <a:prstGeom prst="rect">
             <a:avLst/>
@@ -9122,7 +9145,7 @@
         <p:spPr>
           <a:xfrm>
             <a:off x="0" y="0"/>
-            <a:ext cx="54864" cy="886968"/>
+            <a:ext cx="54864" cy="658368"/>
           </a:xfrm>
           <a:prstGeom prst="rect">
             <a:avLst/>
@@ -9164,7 +9187,7 @@
         </p:nvSpPr>
         <p:spPr>
           <a:xfrm>
-            <a:off x="10308031" y="283464"/>
+            <a:off x="10308031" y="169164"/>
             <a:ext cx="1371600" cy="320040"/>
           </a:xfrm>
           <a:prstGeom prst="roundRect">
@@ -9223,7 +9246,7 @@
         </p:nvSpPr>
         <p:spPr>
           <a:xfrm>
-            <a:off x="603504" y="260604"/>
+            <a:off x="603504" y="146304"/>
             <a:ext cx="9613087" cy="457200"/>
           </a:xfrm>
           <a:prstGeom prst="rect">
@@ -9238,7 +9261,7 @@
           <a:lstStyle/>
           <a:p>
             <a:pPr>
-              <a:defRPr sz="2400" b="1">
+              <a:defRPr sz="2000" b="1">
                 <a:solidFill>
                   <a:srgbClr val="FFFFFF"/>
                 </a:solidFill>
@@ -9259,8 +9282,8 @@
         </p:nvSpPr>
         <p:spPr>
           <a:xfrm>
-            <a:off x="512064" y="1325880"/>
-            <a:ext cx="11167567" cy="4837176"/>
+            <a:off x="512064" y="941832"/>
+            <a:ext cx="11167567" cy="5431536"/>
           </a:xfrm>
           <a:prstGeom prst="rect">
             <a:avLst/>
@@ -9275,12 +9298,12 @@
           <a:p>
             <a:pPr>
               <a:lnSpc>
-                <a:spcPct val="130000"/>
+                <a:spcPct val="110000"/>
               </a:lnSpc>
               <a:spcAft>
-                <a:spcPts val="1000"/>
-              </a:spcAft>
-              <a:defRPr sz="2000">
+                <a:spcPts val="400"/>
+              </a:spcAft>
+              <a:defRPr sz="1700">
                 <a:solidFill>
                   <a:srgbClr val="333333"/>
                 </a:solidFill>
@@ -9294,12 +9317,12 @@
           <a:p>
             <a:pPr>
               <a:lnSpc>
-                <a:spcPct val="130000"/>
+                <a:spcPct val="110000"/>
               </a:lnSpc>
               <a:spcAft>
-                <a:spcPts val="1000"/>
-              </a:spcAft>
-              <a:defRPr sz="2000">
+                <a:spcPts val="400"/>
+              </a:spcAft>
+              <a:defRPr sz="1700">
                 <a:solidFill>
                   <a:srgbClr val="333333"/>
                 </a:solidFill>
@@ -9313,12 +9336,12 @@
           <a:p>
             <a:pPr>
               <a:lnSpc>
-                <a:spcPct val="130000"/>
+                <a:spcPct val="110000"/>
               </a:lnSpc>
               <a:spcAft>
-                <a:spcPts val="1000"/>
-              </a:spcAft>
-              <a:defRPr sz="2000">
+                <a:spcPts val="400"/>
+              </a:spcAft>
+              <a:defRPr sz="1700">
                 <a:solidFill>
                   <a:srgbClr val="333333"/>
                 </a:solidFill>
@@ -9332,12 +9355,12 @@
           <a:p>
             <a:pPr>
               <a:lnSpc>
-                <a:spcPct val="130000"/>
+                <a:spcPct val="110000"/>
               </a:lnSpc>
               <a:spcAft>
-                <a:spcPts val="1000"/>
-              </a:spcAft>
-              <a:defRPr sz="2000">
+                <a:spcPts val="400"/>
+              </a:spcAft>
+              <a:defRPr sz="1700">
                 <a:solidFill>
                   <a:srgbClr val="333333"/>
                 </a:solidFill>
@@ -9351,12 +9374,12 @@
           <a:p>
             <a:pPr>
               <a:lnSpc>
-                <a:spcPct val="130000"/>
+                <a:spcPct val="110000"/>
               </a:lnSpc>
               <a:spcAft>
-                <a:spcPts val="1000"/>
-              </a:spcAft>
-              <a:defRPr sz="2000">
+                <a:spcPts val="400"/>
+              </a:spcAft>
+              <a:defRPr sz="1700">
                 <a:solidFill>
                   <a:srgbClr val="333333"/>
                 </a:solidFill>
@@ -9377,7 +9400,7 @@
         </p:nvSpPr>
         <p:spPr>
           <a:xfrm>
-            <a:off x="512064" y="6400800"/>
+            <a:off x="512064" y="6528816"/>
             <a:ext cx="11167567" cy="12700"/>
           </a:xfrm>
           <a:prstGeom prst="rect">
@@ -9420,7 +9443,7 @@
         </p:nvSpPr>
         <p:spPr>
           <a:xfrm>
-            <a:off x="10948111" y="6492240"/>
+            <a:off x="10948111" y="6620256"/>
             <a:ext cx="731520" cy="274320"/>
           </a:xfrm>
           <a:prstGeom prst="rect">
@@ -9475,7 +9498,7 @@
         <p:spPr>
           <a:xfrm>
             <a:off x="0" y="0"/>
-            <a:ext cx="12191695" cy="886968"/>
+            <a:ext cx="12191695" cy="658368"/>
           </a:xfrm>
           <a:prstGeom prst="rect">
             <a:avLst/>
@@ -9518,7 +9541,7 @@
         <p:spPr>
           <a:xfrm>
             <a:off x="0" y="0"/>
-            <a:ext cx="54864" cy="886968"/>
+            <a:ext cx="54864" cy="658368"/>
           </a:xfrm>
           <a:prstGeom prst="rect">
             <a:avLst/>
@@ -9560,7 +9583,7 @@
         </p:nvSpPr>
         <p:spPr>
           <a:xfrm>
-            <a:off x="10308031" y="283464"/>
+            <a:off x="10308031" y="169164"/>
             <a:ext cx="1371600" cy="320040"/>
           </a:xfrm>
           <a:prstGeom prst="roundRect">
@@ -9619,7 +9642,7 @@
         </p:nvSpPr>
         <p:spPr>
           <a:xfrm>
-            <a:off x="603504" y="260604"/>
+            <a:off x="603504" y="146304"/>
             <a:ext cx="9613087" cy="457200"/>
           </a:xfrm>
           <a:prstGeom prst="rect">
@@ -9634,7 +9657,7 @@
           <a:lstStyle/>
           <a:p>
             <a:pPr>
-              <a:defRPr sz="2400" b="1">
+              <a:defRPr sz="2000" b="1">
                 <a:solidFill>
                   <a:srgbClr val="FFFFFF"/>
                 </a:solidFill>
@@ -9655,8 +9678,8 @@
         </p:nvSpPr>
         <p:spPr>
           <a:xfrm>
-            <a:off x="512064" y="1325880"/>
-            <a:ext cx="11167567" cy="4837176"/>
+            <a:off x="512064" y="941832"/>
+            <a:ext cx="11167567" cy="5431536"/>
           </a:xfrm>
           <a:prstGeom prst="rect">
             <a:avLst/>
@@ -9671,12 +9694,12 @@
           <a:p>
             <a:pPr>
               <a:lnSpc>
-                <a:spcPct val="130000"/>
+                <a:spcPct val="110000"/>
               </a:lnSpc>
               <a:spcAft>
-                <a:spcPts val="1000"/>
-              </a:spcAft>
-              <a:defRPr sz="2000">
+                <a:spcPts val="400"/>
+              </a:spcAft>
+              <a:defRPr sz="1700">
                 <a:solidFill>
                   <a:srgbClr val="333333"/>
                 </a:solidFill>
@@ -9690,12 +9713,12 @@
           <a:p>
             <a:pPr>
               <a:lnSpc>
-                <a:spcPct val="130000"/>
+                <a:spcPct val="110000"/>
               </a:lnSpc>
               <a:spcAft>
-                <a:spcPts val="1000"/>
-              </a:spcAft>
-              <a:defRPr sz="2000">
+                <a:spcPts val="400"/>
+              </a:spcAft>
+              <a:defRPr sz="1700">
                 <a:solidFill>
                   <a:srgbClr val="333333"/>
                 </a:solidFill>
@@ -9709,12 +9732,12 @@
           <a:p>
             <a:pPr>
               <a:lnSpc>
-                <a:spcPct val="130000"/>
+                <a:spcPct val="110000"/>
               </a:lnSpc>
               <a:spcAft>
-                <a:spcPts val="1000"/>
-              </a:spcAft>
-              <a:defRPr sz="2000">
+                <a:spcPts val="400"/>
+              </a:spcAft>
+              <a:defRPr sz="1700">
                 <a:solidFill>
                   <a:srgbClr val="333333"/>
                 </a:solidFill>
@@ -9728,12 +9751,12 @@
           <a:p>
             <a:pPr>
               <a:lnSpc>
-                <a:spcPct val="130000"/>
+                <a:spcPct val="110000"/>
               </a:lnSpc>
               <a:spcAft>
-                <a:spcPts val="1000"/>
-              </a:spcAft>
-              <a:defRPr sz="2000">
+                <a:spcPts val="400"/>
+              </a:spcAft>
+              <a:defRPr sz="1700">
                 <a:solidFill>
                   <a:srgbClr val="333333"/>
                 </a:solidFill>
@@ -9747,12 +9770,12 @@
           <a:p>
             <a:pPr>
               <a:lnSpc>
-                <a:spcPct val="130000"/>
+                <a:spcPct val="110000"/>
               </a:lnSpc>
               <a:spcAft>
-                <a:spcPts val="1000"/>
-              </a:spcAft>
-              <a:defRPr sz="2000">
+                <a:spcPts val="400"/>
+              </a:spcAft>
+              <a:defRPr sz="1700">
                 <a:solidFill>
                   <a:srgbClr val="333333"/>
                 </a:solidFill>
@@ -9773,7 +9796,7 @@
         </p:nvSpPr>
         <p:spPr>
           <a:xfrm>
-            <a:off x="512064" y="6400800"/>
+            <a:off x="512064" y="6528816"/>
             <a:ext cx="11167567" cy="12700"/>
           </a:xfrm>
           <a:prstGeom prst="rect">
@@ -9816,7 +9839,7 @@
         </p:nvSpPr>
         <p:spPr>
           <a:xfrm>
-            <a:off x="10948111" y="6492240"/>
+            <a:off x="10948111" y="6620256"/>
             <a:ext cx="731520" cy="274320"/>
           </a:xfrm>
           <a:prstGeom prst="rect">
@@ -9871,7 +9894,7 @@
         <p:spPr>
           <a:xfrm>
             <a:off x="0" y="0"/>
-            <a:ext cx="12191695" cy="886968"/>
+            <a:ext cx="12191695" cy="658368"/>
           </a:xfrm>
           <a:prstGeom prst="rect">
             <a:avLst/>
@@ -9914,7 +9937,7 @@
         <p:spPr>
           <a:xfrm>
             <a:off x="0" y="0"/>
-            <a:ext cx="54864" cy="886968"/>
+            <a:ext cx="54864" cy="658368"/>
           </a:xfrm>
           <a:prstGeom prst="rect">
             <a:avLst/>
@@ -9956,7 +9979,7 @@
         </p:nvSpPr>
         <p:spPr>
           <a:xfrm>
-            <a:off x="10308031" y="283464"/>
+            <a:off x="10308031" y="169164"/>
             <a:ext cx="1371600" cy="320040"/>
           </a:xfrm>
           <a:prstGeom prst="roundRect">
@@ -10015,7 +10038,7 @@
         </p:nvSpPr>
         <p:spPr>
           <a:xfrm>
-            <a:off x="603504" y="260604"/>
+            <a:off x="603504" y="146304"/>
             <a:ext cx="9613087" cy="457200"/>
           </a:xfrm>
           <a:prstGeom prst="rect">
@@ -10030,7 +10053,7 @@
           <a:lstStyle/>
           <a:p>
             <a:pPr>
-              <a:defRPr sz="2400" b="1">
+              <a:defRPr sz="2000" b="1">
                 <a:solidFill>
                   <a:srgbClr val="FFFFFF"/>
                 </a:solidFill>
@@ -10051,8 +10074,8 @@
         </p:nvSpPr>
         <p:spPr>
           <a:xfrm>
-            <a:off x="512064" y="1325880"/>
-            <a:ext cx="11167567" cy="4837176"/>
+            <a:off x="512064" y="941832"/>
+            <a:ext cx="11167567" cy="5431536"/>
           </a:xfrm>
           <a:prstGeom prst="rect">
             <a:avLst/>
@@ -10067,12 +10090,12 @@
           <a:p>
             <a:pPr>
               <a:lnSpc>
-                <a:spcPct val="130000"/>
+                <a:spcPct val="110000"/>
               </a:lnSpc>
               <a:spcAft>
-                <a:spcPts val="1000"/>
-              </a:spcAft>
-              <a:defRPr sz="2000">
+                <a:spcPts val="400"/>
+              </a:spcAft>
+              <a:defRPr sz="1700">
                 <a:solidFill>
                   <a:srgbClr val="333333"/>
                 </a:solidFill>
@@ -10086,12 +10109,12 @@
           <a:p>
             <a:pPr>
               <a:lnSpc>
-                <a:spcPct val="130000"/>
+                <a:spcPct val="110000"/>
               </a:lnSpc>
               <a:spcAft>
-                <a:spcPts val="1000"/>
-              </a:spcAft>
-              <a:defRPr sz="2000">
+                <a:spcPts val="400"/>
+              </a:spcAft>
+              <a:defRPr sz="1700">
                 <a:solidFill>
                   <a:srgbClr val="333333"/>
                 </a:solidFill>
@@ -10105,12 +10128,12 @@
           <a:p>
             <a:pPr>
               <a:lnSpc>
-                <a:spcPct val="130000"/>
+                <a:spcPct val="110000"/>
               </a:lnSpc>
               <a:spcAft>
-                <a:spcPts val="1000"/>
-              </a:spcAft>
-              <a:defRPr sz="2000">
+                <a:spcPts val="400"/>
+              </a:spcAft>
+              <a:defRPr sz="1700">
                 <a:solidFill>
                   <a:srgbClr val="333333"/>
                 </a:solidFill>
@@ -10124,12 +10147,12 @@
           <a:p>
             <a:pPr>
               <a:lnSpc>
-                <a:spcPct val="130000"/>
+                <a:spcPct val="110000"/>
               </a:lnSpc>
               <a:spcAft>
-                <a:spcPts val="1000"/>
-              </a:spcAft>
-              <a:defRPr sz="2000">
+                <a:spcPts val="400"/>
+              </a:spcAft>
+              <a:defRPr sz="1700">
                 <a:solidFill>
                   <a:srgbClr val="333333"/>
                 </a:solidFill>
@@ -10143,12 +10166,12 @@
           <a:p>
             <a:pPr>
               <a:lnSpc>
-                <a:spcPct val="130000"/>
+                <a:spcPct val="110000"/>
               </a:lnSpc>
               <a:spcAft>
-                <a:spcPts val="1000"/>
-              </a:spcAft>
-              <a:defRPr sz="2000">
+                <a:spcPts val="400"/>
+              </a:spcAft>
+              <a:defRPr sz="1700">
                 <a:solidFill>
                   <a:srgbClr val="333333"/>
                 </a:solidFill>
@@ -10169,7 +10192,7 @@
         </p:nvSpPr>
         <p:spPr>
           <a:xfrm>
-            <a:off x="512064" y="6400800"/>
+            <a:off x="512064" y="6528816"/>
             <a:ext cx="11167567" cy="12700"/>
           </a:xfrm>
           <a:prstGeom prst="rect">
@@ -10212,7 +10235,7 @@
         </p:nvSpPr>
         <p:spPr>
           <a:xfrm>
-            <a:off x="10948111" y="6492240"/>
+            <a:off x="10948111" y="6620256"/>
             <a:ext cx="731520" cy="274320"/>
           </a:xfrm>
           <a:prstGeom prst="rect">
